--- a/docs/slides/Modulo 3/dia_2.pptx
+++ b/docs/slides/Modulo 3/dia_2.pptx
@@ -5,17 +5,19 @@
     <p:sldMasterId id="2147483648" r:id="rId1"/>
   </p:sldMasterIdLst>
   <p:sldIdLst>
-    <p:sldId id="256" r:id="rId7"/>
-    <p:sldId id="257" r:id="rId8"/>
-    <p:sldId id="258" r:id="rId9"/>
-    <p:sldId id="259" r:id="rId10"/>
-    <p:sldId id="260" r:id="rId11"/>
-    <p:sldId id="261" r:id="rId12"/>
-    <p:sldId id="262" r:id="rId13"/>
-    <p:sldId id="263" r:id="rId14"/>
-    <p:sldId id="264" r:id="rId15"/>
+    <p:sldId id="256" r:id="rId2"/>
+    <p:sldId id="257" r:id="rId3"/>
+    <p:sldId id="258" r:id="rId4"/>
+    <p:sldId id="259" r:id="rId5"/>
+    <p:sldId id="260" r:id="rId6"/>
+    <p:sldId id="261" r:id="rId7"/>
+    <p:sldId id="262" r:id="rId8"/>
+    <p:sldId id="263" r:id="rId9"/>
+    <p:sldId id="264" r:id="rId10"/>
+    <p:sldId id="265" r:id="rId15"/>
+    <p:sldId id="266" r:id="rId16"/>
   </p:sldIdLst>
-  <p:sldSz cx="12188952" cy="6858000" type="screen4x3"/>
+  <p:sldSz cx="12188825" cy="6858000"/>
   <p:notesSz cx="6858000" cy="9144000"/>
   <p:defaultTextStyle>
     <a:defPPr>
@@ -112,6 +114,22 @@
       </a:defRPr>
     </a:lvl9pPr>
   </p:defaultTextStyle>
+  <p:extLst>
+    <p:ext uri="{EFAFB233-063F-42B5-8137-9DF3F51BA10A}">
+      <p15:sldGuideLst xmlns:p15="http://schemas.microsoft.com/office/powerpoint/2012/main">
+        <p15:guide id="1" orient="horz" pos="2160">
+          <p15:clr>
+            <a:srgbClr val="A4A3A4"/>
+          </p15:clr>
+        </p15:guide>
+        <p15:guide id="2" pos="2880">
+          <p15:clr>
+            <a:srgbClr val="A4A3A4"/>
+          </p15:clr>
+        </p15:guide>
+      </p15:sldGuideLst>
+    </p:ext>
+  </p:extLst>
 </p:presentation>
 </file>
 
@@ -153,10 +171,9 @@
           <a:lstStyle/>
           <a:p>
             <a:r>
-              <a:rPr lang="en-US" smtClean="0"/>
+              <a:rPr lang="en-US"/>
               <a:t>Click to edit Master title style</a:t>
             </a:r>
-            <a:endParaRPr lang="en-US"/>
           </a:p>
         </p:txBody>
       </p:sp>
@@ -272,10 +289,9 @@
           </a:lstStyle>
           <a:p>
             <a:r>
-              <a:rPr lang="en-US" smtClean="0"/>
+              <a:rPr lang="en-US"/>
               <a:t>Click to edit Master subtitle style</a:t>
             </a:r>
-            <a:endParaRPr lang="en-US"/>
           </a:p>
         </p:txBody>
       </p:sp>
@@ -296,7 +312,7 @@
           <a:p>
             <a:fld id="{5BCAD085-E8A6-8845-BD4E-CB4CCA059FC4}" type="datetimeFigureOut">
               <a:rPr lang="en-US" smtClean="0"/>
-              <a:t>1/27/13</a:t>
+              <a:t>4/23/2026</a:t>
             </a:fld>
             <a:endParaRPr lang="en-US"/>
           </a:p>
@@ -338,7 +354,7 @@
           <a:p>
             <a:fld id="{C1FF6DA9-008F-8B48-92A6-B652298478BF}" type="slidenum">
               <a:rPr lang="en-US" smtClean="0"/>
-              <a:t>‹#›</a:t>
+              <a:t>‹Nº›</a:t>
             </a:fld>
             <a:endParaRPr lang="en-US"/>
           </a:p>
@@ -390,10 +406,9 @@
           <a:lstStyle/>
           <a:p>
             <a:r>
-              <a:rPr lang="en-US" smtClean="0"/>
+              <a:rPr lang="en-US"/>
               <a:t>Click to edit Master title style</a:t>
             </a:r>
-            <a:endParaRPr lang="en-US"/>
           </a:p>
         </p:txBody>
       </p:sp>
@@ -414,38 +429,37 @@
           <a:p>
             <a:pPr lvl="0"/>
             <a:r>
-              <a:rPr lang="en-US" smtClean="0"/>
+              <a:rPr lang="en-US"/>
               <a:t>Click to edit Master text styles</a:t>
             </a:r>
           </a:p>
           <a:p>
             <a:pPr lvl="1"/>
             <a:r>
-              <a:rPr lang="en-US" smtClean="0"/>
+              <a:rPr lang="en-US"/>
               <a:t>Second level</a:t>
             </a:r>
           </a:p>
           <a:p>
             <a:pPr lvl="2"/>
             <a:r>
-              <a:rPr lang="en-US" smtClean="0"/>
+              <a:rPr lang="en-US"/>
               <a:t>Third level</a:t>
             </a:r>
           </a:p>
           <a:p>
             <a:pPr lvl="3"/>
             <a:r>
-              <a:rPr lang="en-US" smtClean="0"/>
+              <a:rPr lang="en-US"/>
               <a:t>Fourth level</a:t>
             </a:r>
           </a:p>
           <a:p>
             <a:pPr lvl="4"/>
             <a:r>
-              <a:rPr lang="en-US" smtClean="0"/>
+              <a:rPr lang="en-US"/>
               <a:t>Fifth level</a:t>
             </a:r>
-            <a:endParaRPr lang="en-US"/>
           </a:p>
         </p:txBody>
       </p:sp>
@@ -466,7 +480,7 @@
           <a:p>
             <a:fld id="{5BCAD085-E8A6-8845-BD4E-CB4CCA059FC4}" type="datetimeFigureOut">
               <a:rPr lang="en-US" smtClean="0"/>
-              <a:t>1/27/13</a:t>
+              <a:t>4/23/2026</a:t>
             </a:fld>
             <a:endParaRPr lang="en-US"/>
           </a:p>
@@ -508,7 +522,7 @@
           <a:p>
             <a:fld id="{C1FF6DA9-008F-8B48-92A6-B652298478BF}" type="slidenum">
               <a:rPr lang="en-US" smtClean="0"/>
-              <a:t>‹#›</a:t>
+              <a:t>‹Nº›</a:t>
             </a:fld>
             <a:endParaRPr lang="en-US"/>
           </a:p>
@@ -565,10 +579,9 @@
           <a:lstStyle/>
           <a:p>
             <a:r>
-              <a:rPr lang="en-US" smtClean="0"/>
+              <a:rPr lang="en-US"/>
               <a:t>Click to edit Master title style</a:t>
             </a:r>
-            <a:endParaRPr lang="en-US"/>
           </a:p>
         </p:txBody>
       </p:sp>
@@ -594,38 +607,37 @@
           <a:p>
             <a:pPr lvl="0"/>
             <a:r>
-              <a:rPr lang="en-US" smtClean="0"/>
+              <a:rPr lang="en-US"/>
               <a:t>Click to edit Master text styles</a:t>
             </a:r>
           </a:p>
           <a:p>
             <a:pPr lvl="1"/>
             <a:r>
-              <a:rPr lang="en-US" smtClean="0"/>
+              <a:rPr lang="en-US"/>
               <a:t>Second level</a:t>
             </a:r>
           </a:p>
           <a:p>
             <a:pPr lvl="2"/>
             <a:r>
-              <a:rPr lang="en-US" smtClean="0"/>
+              <a:rPr lang="en-US"/>
               <a:t>Third level</a:t>
             </a:r>
           </a:p>
           <a:p>
             <a:pPr lvl="3"/>
             <a:r>
-              <a:rPr lang="en-US" smtClean="0"/>
+              <a:rPr lang="en-US"/>
               <a:t>Fourth level</a:t>
             </a:r>
           </a:p>
           <a:p>
             <a:pPr lvl="4"/>
             <a:r>
-              <a:rPr lang="en-US" smtClean="0"/>
+              <a:rPr lang="en-US"/>
               <a:t>Fifth level</a:t>
             </a:r>
-            <a:endParaRPr lang="en-US"/>
           </a:p>
         </p:txBody>
       </p:sp>
@@ -646,7 +658,7 @@
           <a:p>
             <a:fld id="{5BCAD085-E8A6-8845-BD4E-CB4CCA059FC4}" type="datetimeFigureOut">
               <a:rPr lang="en-US" smtClean="0"/>
-              <a:t>1/27/13</a:t>
+              <a:t>4/23/2026</a:t>
             </a:fld>
             <a:endParaRPr lang="en-US"/>
           </a:p>
@@ -688,7 +700,7 @@
           <a:p>
             <a:fld id="{C1FF6DA9-008F-8B48-92A6-B652298478BF}" type="slidenum">
               <a:rPr lang="en-US" smtClean="0"/>
-              <a:t>‹#›</a:t>
+              <a:t>‹Nº›</a:t>
             </a:fld>
             <a:endParaRPr lang="en-US"/>
           </a:p>
@@ -740,10 +752,9 @@
           <a:lstStyle/>
           <a:p>
             <a:r>
-              <a:rPr lang="en-US" smtClean="0"/>
+              <a:rPr lang="en-US"/>
               <a:t>Click to edit Master title style</a:t>
             </a:r>
-            <a:endParaRPr lang="en-US"/>
           </a:p>
         </p:txBody>
       </p:sp>
@@ -764,38 +775,37 @@
           <a:p>
             <a:pPr lvl="0"/>
             <a:r>
-              <a:rPr lang="en-US" smtClean="0"/>
+              <a:rPr lang="en-US"/>
               <a:t>Click to edit Master text styles</a:t>
             </a:r>
           </a:p>
           <a:p>
             <a:pPr lvl="1"/>
             <a:r>
-              <a:rPr lang="en-US" smtClean="0"/>
+              <a:rPr lang="en-US"/>
               <a:t>Second level</a:t>
             </a:r>
           </a:p>
           <a:p>
             <a:pPr lvl="2"/>
             <a:r>
-              <a:rPr lang="en-US" smtClean="0"/>
+              <a:rPr lang="en-US"/>
               <a:t>Third level</a:t>
             </a:r>
           </a:p>
           <a:p>
             <a:pPr lvl="3"/>
             <a:r>
-              <a:rPr lang="en-US" smtClean="0"/>
+              <a:rPr lang="en-US"/>
               <a:t>Fourth level</a:t>
             </a:r>
           </a:p>
           <a:p>
             <a:pPr lvl="4"/>
             <a:r>
-              <a:rPr lang="en-US" smtClean="0"/>
+              <a:rPr lang="en-US"/>
               <a:t>Fifth level</a:t>
             </a:r>
-            <a:endParaRPr lang="en-US"/>
           </a:p>
         </p:txBody>
       </p:sp>
@@ -816,7 +826,7 @@
           <a:p>
             <a:fld id="{5BCAD085-E8A6-8845-BD4E-CB4CCA059FC4}" type="datetimeFigureOut">
               <a:rPr lang="en-US" smtClean="0"/>
-              <a:t>1/27/13</a:t>
+              <a:t>4/23/2026</a:t>
             </a:fld>
             <a:endParaRPr lang="en-US"/>
           </a:p>
@@ -858,7 +868,7 @@
           <a:p>
             <a:fld id="{C1FF6DA9-008F-8B48-92A6-B652298478BF}" type="slidenum">
               <a:rPr lang="en-US" smtClean="0"/>
-              <a:t>‹#›</a:t>
+              <a:t>‹Nº›</a:t>
             </a:fld>
             <a:endParaRPr lang="en-US"/>
           </a:p>
@@ -919,10 +929,9 @@
           </a:lstStyle>
           <a:p>
             <a:r>
-              <a:rPr lang="en-US" smtClean="0"/>
+              <a:rPr lang="en-US"/>
               <a:t>Click to edit Master title style</a:t>
             </a:r>
-            <a:endParaRPr lang="en-US"/>
           </a:p>
         </p:txBody>
       </p:sp>
@@ -1039,7 +1048,7 @@
           <a:p>
             <a:pPr lvl="0"/>
             <a:r>
-              <a:rPr lang="en-US" smtClean="0"/>
+              <a:rPr lang="en-US"/>
               <a:t>Click to edit Master text styles</a:t>
             </a:r>
           </a:p>
@@ -1062,7 +1071,7 @@
           <a:p>
             <a:fld id="{5BCAD085-E8A6-8845-BD4E-CB4CCA059FC4}" type="datetimeFigureOut">
               <a:rPr lang="en-US" smtClean="0"/>
-              <a:t>1/27/13</a:t>
+              <a:t>4/23/2026</a:t>
             </a:fld>
             <a:endParaRPr lang="en-US"/>
           </a:p>
@@ -1104,7 +1113,7 @@
           <a:p>
             <a:fld id="{C1FF6DA9-008F-8B48-92A6-B652298478BF}" type="slidenum">
               <a:rPr lang="en-US" smtClean="0"/>
-              <a:t>‹#›</a:t>
+              <a:t>‹Nº›</a:t>
             </a:fld>
             <a:endParaRPr lang="en-US"/>
           </a:p>
@@ -1156,10 +1165,9 @@
           <a:lstStyle/>
           <a:p>
             <a:r>
-              <a:rPr lang="en-US" smtClean="0"/>
+              <a:rPr lang="en-US"/>
               <a:t>Click to edit Master title style</a:t>
             </a:r>
-            <a:endParaRPr lang="en-US"/>
           </a:p>
         </p:txBody>
       </p:sp>
@@ -1213,38 +1221,37 @@
           <a:p>
             <a:pPr lvl="0"/>
             <a:r>
-              <a:rPr lang="en-US" smtClean="0"/>
+              <a:rPr lang="en-US"/>
               <a:t>Click to edit Master text styles</a:t>
             </a:r>
           </a:p>
           <a:p>
             <a:pPr lvl="1"/>
             <a:r>
-              <a:rPr lang="en-US" smtClean="0"/>
+              <a:rPr lang="en-US"/>
               <a:t>Second level</a:t>
             </a:r>
           </a:p>
           <a:p>
             <a:pPr lvl="2"/>
             <a:r>
-              <a:rPr lang="en-US" smtClean="0"/>
+              <a:rPr lang="en-US"/>
               <a:t>Third level</a:t>
             </a:r>
           </a:p>
           <a:p>
             <a:pPr lvl="3"/>
             <a:r>
-              <a:rPr lang="en-US" smtClean="0"/>
+              <a:rPr lang="en-US"/>
               <a:t>Fourth level</a:t>
             </a:r>
           </a:p>
           <a:p>
             <a:pPr lvl="4"/>
             <a:r>
-              <a:rPr lang="en-US" smtClean="0"/>
+              <a:rPr lang="en-US"/>
               <a:t>Fifth level</a:t>
             </a:r>
-            <a:endParaRPr lang="en-US"/>
           </a:p>
         </p:txBody>
       </p:sp>
@@ -1298,38 +1305,37 @@
           <a:p>
             <a:pPr lvl="0"/>
             <a:r>
-              <a:rPr lang="en-US" smtClean="0"/>
+              <a:rPr lang="en-US"/>
               <a:t>Click to edit Master text styles</a:t>
             </a:r>
           </a:p>
           <a:p>
             <a:pPr lvl="1"/>
             <a:r>
-              <a:rPr lang="en-US" smtClean="0"/>
+              <a:rPr lang="en-US"/>
               <a:t>Second level</a:t>
             </a:r>
           </a:p>
           <a:p>
             <a:pPr lvl="2"/>
             <a:r>
-              <a:rPr lang="en-US" smtClean="0"/>
+              <a:rPr lang="en-US"/>
               <a:t>Third level</a:t>
             </a:r>
           </a:p>
           <a:p>
             <a:pPr lvl="3"/>
             <a:r>
-              <a:rPr lang="en-US" smtClean="0"/>
+              <a:rPr lang="en-US"/>
               <a:t>Fourth level</a:t>
             </a:r>
           </a:p>
           <a:p>
             <a:pPr lvl="4"/>
             <a:r>
-              <a:rPr lang="en-US" smtClean="0"/>
+              <a:rPr lang="en-US"/>
               <a:t>Fifth level</a:t>
             </a:r>
-            <a:endParaRPr lang="en-US"/>
           </a:p>
         </p:txBody>
       </p:sp>
@@ -1350,7 +1356,7 @@
           <a:p>
             <a:fld id="{5BCAD085-E8A6-8845-BD4E-CB4CCA059FC4}" type="datetimeFigureOut">
               <a:rPr lang="en-US" smtClean="0"/>
-              <a:t>1/27/13</a:t>
+              <a:t>4/23/2026</a:t>
             </a:fld>
             <a:endParaRPr lang="en-US"/>
           </a:p>
@@ -1392,7 +1398,7 @@
           <a:p>
             <a:fld id="{C1FF6DA9-008F-8B48-92A6-B652298478BF}" type="slidenum">
               <a:rPr lang="en-US" smtClean="0"/>
-              <a:t>‹#›</a:t>
+              <a:t>‹Nº›</a:t>
             </a:fld>
             <a:endParaRPr lang="en-US"/>
           </a:p>
@@ -1448,10 +1454,9 @@
           </a:lstStyle>
           <a:p>
             <a:r>
-              <a:rPr lang="en-US" smtClean="0"/>
+              <a:rPr lang="en-US"/>
               <a:t>Click to edit Master title style</a:t>
             </a:r>
-            <a:endParaRPr lang="en-US"/>
           </a:p>
         </p:txBody>
       </p:sp>
@@ -1514,7 +1519,7 @@
           <a:p>
             <a:pPr lvl="0"/>
             <a:r>
-              <a:rPr lang="en-US" smtClean="0"/>
+              <a:rPr lang="en-US"/>
               <a:t>Click to edit Master text styles</a:t>
             </a:r>
           </a:p>
@@ -1570,38 +1575,37 @@
           <a:p>
             <a:pPr lvl="0"/>
             <a:r>
-              <a:rPr lang="en-US" smtClean="0"/>
+              <a:rPr lang="en-US"/>
               <a:t>Click to edit Master text styles</a:t>
             </a:r>
           </a:p>
           <a:p>
             <a:pPr lvl="1"/>
             <a:r>
-              <a:rPr lang="en-US" smtClean="0"/>
+              <a:rPr lang="en-US"/>
               <a:t>Second level</a:t>
             </a:r>
           </a:p>
           <a:p>
             <a:pPr lvl="2"/>
             <a:r>
-              <a:rPr lang="en-US" smtClean="0"/>
+              <a:rPr lang="en-US"/>
               <a:t>Third level</a:t>
             </a:r>
           </a:p>
           <a:p>
             <a:pPr lvl="3"/>
             <a:r>
-              <a:rPr lang="en-US" smtClean="0"/>
+              <a:rPr lang="en-US"/>
               <a:t>Fourth level</a:t>
             </a:r>
           </a:p>
           <a:p>
             <a:pPr lvl="4"/>
             <a:r>
-              <a:rPr lang="en-US" smtClean="0"/>
+              <a:rPr lang="en-US"/>
               <a:t>Fifth level</a:t>
             </a:r>
-            <a:endParaRPr lang="en-US"/>
           </a:p>
         </p:txBody>
       </p:sp>
@@ -1664,7 +1668,7 @@
           <a:p>
             <a:pPr lvl="0"/>
             <a:r>
-              <a:rPr lang="en-US" smtClean="0"/>
+              <a:rPr lang="en-US"/>
               <a:t>Click to edit Master text styles</a:t>
             </a:r>
           </a:p>
@@ -1720,38 +1724,37 @@
           <a:p>
             <a:pPr lvl="0"/>
             <a:r>
-              <a:rPr lang="en-US" smtClean="0"/>
+              <a:rPr lang="en-US"/>
               <a:t>Click to edit Master text styles</a:t>
             </a:r>
           </a:p>
           <a:p>
             <a:pPr lvl="1"/>
             <a:r>
-              <a:rPr lang="en-US" smtClean="0"/>
+              <a:rPr lang="en-US"/>
               <a:t>Second level</a:t>
             </a:r>
           </a:p>
           <a:p>
             <a:pPr lvl="2"/>
             <a:r>
-              <a:rPr lang="en-US" smtClean="0"/>
+              <a:rPr lang="en-US"/>
               <a:t>Third level</a:t>
             </a:r>
           </a:p>
           <a:p>
             <a:pPr lvl="3"/>
             <a:r>
-              <a:rPr lang="en-US" smtClean="0"/>
+              <a:rPr lang="en-US"/>
               <a:t>Fourth level</a:t>
             </a:r>
           </a:p>
           <a:p>
             <a:pPr lvl="4"/>
             <a:r>
-              <a:rPr lang="en-US" smtClean="0"/>
+              <a:rPr lang="en-US"/>
               <a:t>Fifth level</a:t>
             </a:r>
-            <a:endParaRPr lang="en-US"/>
           </a:p>
         </p:txBody>
       </p:sp>
@@ -1772,7 +1775,7 @@
           <a:p>
             <a:fld id="{5BCAD085-E8A6-8845-BD4E-CB4CCA059FC4}" type="datetimeFigureOut">
               <a:rPr lang="en-US" smtClean="0"/>
-              <a:t>1/27/13</a:t>
+              <a:t>4/23/2026</a:t>
             </a:fld>
             <a:endParaRPr lang="en-US"/>
           </a:p>
@@ -1814,7 +1817,7 @@
           <a:p>
             <a:fld id="{C1FF6DA9-008F-8B48-92A6-B652298478BF}" type="slidenum">
               <a:rPr lang="en-US" smtClean="0"/>
-              <a:t>‹#›</a:t>
+              <a:t>‹Nº›</a:t>
             </a:fld>
             <a:endParaRPr lang="en-US"/>
           </a:p>
@@ -1866,10 +1869,9 @@
           <a:lstStyle/>
           <a:p>
             <a:r>
-              <a:rPr lang="en-US" smtClean="0"/>
+              <a:rPr lang="en-US"/>
               <a:t>Click to edit Master title style</a:t>
             </a:r>
-            <a:endParaRPr lang="en-US"/>
           </a:p>
         </p:txBody>
       </p:sp>
@@ -1890,7 +1892,7 @@
           <a:p>
             <a:fld id="{5BCAD085-E8A6-8845-BD4E-CB4CCA059FC4}" type="datetimeFigureOut">
               <a:rPr lang="en-US" smtClean="0"/>
-              <a:t>1/27/13</a:t>
+              <a:t>4/23/2026</a:t>
             </a:fld>
             <a:endParaRPr lang="en-US"/>
           </a:p>
@@ -1932,7 +1934,7 @@
           <a:p>
             <a:fld id="{C1FF6DA9-008F-8B48-92A6-B652298478BF}" type="slidenum">
               <a:rPr lang="en-US" smtClean="0"/>
-              <a:t>‹#›</a:t>
+              <a:t>‹Nº›</a:t>
             </a:fld>
             <a:endParaRPr lang="en-US"/>
           </a:p>
@@ -1985,7 +1987,7 @@
           <a:p>
             <a:fld id="{5BCAD085-E8A6-8845-BD4E-CB4CCA059FC4}" type="datetimeFigureOut">
               <a:rPr lang="en-US" smtClean="0"/>
-              <a:t>1/27/13</a:t>
+              <a:t>4/23/2026</a:t>
             </a:fld>
             <a:endParaRPr lang="en-US"/>
           </a:p>
@@ -2027,7 +2029,7 @@
           <a:p>
             <a:fld id="{C1FF6DA9-008F-8B48-92A6-B652298478BF}" type="slidenum">
               <a:rPr lang="en-US" smtClean="0"/>
-              <a:t>‹#›</a:t>
+              <a:t>‹Nº›</a:t>
             </a:fld>
             <a:endParaRPr lang="en-US"/>
           </a:p>
@@ -2088,10 +2090,9 @@
           </a:lstStyle>
           <a:p>
             <a:r>
-              <a:rPr lang="en-US" smtClean="0"/>
+              <a:rPr lang="en-US"/>
               <a:t>Click to edit Master title style</a:t>
             </a:r>
-            <a:endParaRPr lang="en-US"/>
           </a:p>
         </p:txBody>
       </p:sp>
@@ -2145,38 +2146,37 @@
           <a:p>
             <a:pPr lvl="0"/>
             <a:r>
-              <a:rPr lang="en-US" smtClean="0"/>
+              <a:rPr lang="en-US"/>
               <a:t>Click to edit Master text styles</a:t>
             </a:r>
           </a:p>
           <a:p>
             <a:pPr lvl="1"/>
             <a:r>
-              <a:rPr lang="en-US" smtClean="0"/>
+              <a:rPr lang="en-US"/>
               <a:t>Second level</a:t>
             </a:r>
           </a:p>
           <a:p>
             <a:pPr lvl="2"/>
             <a:r>
-              <a:rPr lang="en-US" smtClean="0"/>
+              <a:rPr lang="en-US"/>
               <a:t>Third level</a:t>
             </a:r>
           </a:p>
           <a:p>
             <a:pPr lvl="3"/>
             <a:r>
-              <a:rPr lang="en-US" smtClean="0"/>
+              <a:rPr lang="en-US"/>
               <a:t>Fourth level</a:t>
             </a:r>
           </a:p>
           <a:p>
             <a:pPr lvl="4"/>
             <a:r>
-              <a:rPr lang="en-US" smtClean="0"/>
+              <a:rPr lang="en-US"/>
               <a:t>Fifth level</a:t>
             </a:r>
-            <a:endParaRPr lang="en-US"/>
           </a:p>
         </p:txBody>
       </p:sp>
@@ -2239,7 +2239,7 @@
           <a:p>
             <a:pPr lvl="0"/>
             <a:r>
-              <a:rPr lang="en-US" smtClean="0"/>
+              <a:rPr lang="en-US"/>
               <a:t>Click to edit Master text styles</a:t>
             </a:r>
           </a:p>
@@ -2262,7 +2262,7 @@
           <a:p>
             <a:fld id="{5BCAD085-E8A6-8845-BD4E-CB4CCA059FC4}" type="datetimeFigureOut">
               <a:rPr lang="en-US" smtClean="0"/>
-              <a:t>1/27/13</a:t>
+              <a:t>4/23/2026</a:t>
             </a:fld>
             <a:endParaRPr lang="en-US"/>
           </a:p>
@@ -2304,7 +2304,7 @@
           <a:p>
             <a:fld id="{C1FF6DA9-008F-8B48-92A6-B652298478BF}" type="slidenum">
               <a:rPr lang="en-US" smtClean="0"/>
-              <a:t>‹#›</a:t>
+              <a:t>‹Nº›</a:t>
             </a:fld>
             <a:endParaRPr lang="en-US"/>
           </a:p>
@@ -2365,10 +2365,9 @@
           </a:lstStyle>
           <a:p>
             <a:r>
-              <a:rPr lang="en-US" smtClean="0"/>
+              <a:rPr lang="en-US"/>
               <a:t>Click to edit Master title style</a:t>
             </a:r>
-            <a:endParaRPr lang="en-US"/>
           </a:p>
         </p:txBody>
       </p:sp>
@@ -2492,7 +2491,7 @@
           <a:p>
             <a:pPr lvl="0"/>
             <a:r>
-              <a:rPr lang="en-US" smtClean="0"/>
+              <a:rPr lang="en-US"/>
               <a:t>Click to edit Master text styles</a:t>
             </a:r>
           </a:p>
@@ -2515,7 +2514,7 @@
           <a:p>
             <a:fld id="{5BCAD085-E8A6-8845-BD4E-CB4CCA059FC4}" type="datetimeFigureOut">
               <a:rPr lang="en-US" smtClean="0"/>
-              <a:t>1/27/13</a:t>
+              <a:t>4/23/2026</a:t>
             </a:fld>
             <a:endParaRPr lang="en-US"/>
           </a:p>
@@ -2557,7 +2556,7 @@
           <a:p>
             <a:fld id="{C1FF6DA9-008F-8B48-92A6-B652298478BF}" type="slidenum">
               <a:rPr lang="en-US" smtClean="0"/>
-              <a:t>‹#›</a:t>
+              <a:t>‹Nº›</a:t>
             </a:fld>
             <a:endParaRPr lang="en-US"/>
           </a:p>
@@ -2624,10 +2623,9 @@
           <a:lstStyle/>
           <a:p>
             <a:r>
-              <a:rPr lang="en-US" smtClean="0"/>
+              <a:rPr lang="en-US"/>
               <a:t>Click to edit Master title style</a:t>
             </a:r>
-            <a:endParaRPr lang="en-US"/>
           </a:p>
         </p:txBody>
       </p:sp>
@@ -2658,38 +2656,37 @@
           <a:p>
             <a:pPr lvl="0"/>
             <a:r>
-              <a:rPr lang="en-US" smtClean="0"/>
+              <a:rPr lang="en-US"/>
               <a:t>Click to edit Master text styles</a:t>
             </a:r>
           </a:p>
           <a:p>
             <a:pPr lvl="1"/>
             <a:r>
-              <a:rPr lang="en-US" smtClean="0"/>
+              <a:rPr lang="en-US"/>
               <a:t>Second level</a:t>
             </a:r>
           </a:p>
           <a:p>
             <a:pPr lvl="2"/>
             <a:r>
-              <a:rPr lang="en-US" smtClean="0"/>
+              <a:rPr lang="en-US"/>
               <a:t>Third level</a:t>
             </a:r>
           </a:p>
           <a:p>
             <a:pPr lvl="3"/>
             <a:r>
-              <a:rPr lang="en-US" smtClean="0"/>
+              <a:rPr lang="en-US"/>
               <a:t>Fourth level</a:t>
             </a:r>
           </a:p>
           <a:p>
             <a:pPr lvl="4"/>
             <a:r>
-              <a:rPr lang="en-US" smtClean="0"/>
+              <a:rPr lang="en-US"/>
               <a:t>Fifth level</a:t>
             </a:r>
-            <a:endParaRPr lang="en-US"/>
           </a:p>
         </p:txBody>
       </p:sp>
@@ -2728,7 +2725,7 @@
           <a:p>
             <a:fld id="{5BCAD085-E8A6-8845-BD4E-CB4CCA059FC4}" type="datetimeFigureOut">
               <a:rPr lang="en-US" smtClean="0"/>
-              <a:t>1/27/13</a:t>
+              <a:t>4/23/2026</a:t>
             </a:fld>
             <a:endParaRPr lang="en-US"/>
           </a:p>
@@ -2806,7 +2803,7 @@
           <a:p>
             <a:fld id="{C1FF6DA9-008F-8B48-92A6-B652298478BF}" type="slidenum">
               <a:rPr lang="en-US" smtClean="0"/>
-              <a:t>‹#›</a:t>
+              <a:t>‹Nº›</a:t>
             </a:fld>
             <a:endParaRPr lang="en-US"/>
           </a:p>
@@ -3087,7 +3084,7 @@
 </file>
 
 <file path=ppt/slides/slide1.xml><?xml version="1.0" encoding="utf-8"?>
-<p:sld xmlns:a="http://schemas.openxmlformats.org/drawingml/2006/main" xmlns:p="http://schemas.openxmlformats.org/presentationml/2006/main" xmlns:r="http://schemas.openxmlformats.org/officeDocument/2006/relationships">
+<p:sld xmlns:a="http://schemas.openxmlformats.org/drawingml/2006/main" xmlns:r="http://schemas.openxmlformats.org/officeDocument/2006/relationships" xmlns:p="http://schemas.openxmlformats.org/presentationml/2006/main">
   <p:cSld>
     <p:spTree>
       <p:nvGrpSpPr>
@@ -3095,7 +3092,14 @@
         <p:cNvGrpSpPr/>
         <p:nvPr/>
       </p:nvGrpSpPr>
-      <p:grpSpPr/>
+      <p:grpSpPr>
+        <a:xfrm>
+          <a:off x="0" y="0"/>
+          <a:ext cx="0" cy="0"/>
+          <a:chOff x="0" y="0"/>
+          <a:chExt cx="0" cy="0"/>
+        </a:xfrm>
+      </p:grpSpPr>
       <p:sp>
         <p:nvSpPr>
           <p:cNvPr id="2" name="Rectangle 1"/>
@@ -3136,6 +3140,7 @@
           <a:lstStyle/>
           <a:p>
             <a:pPr algn="ctr"/>
+            <a:endParaRPr/>
           </a:p>
         </p:txBody>
       </p:sp>
@@ -3179,6 +3184,7 @@
           <a:lstStyle/>
           <a:p>
             <a:pPr algn="ctr"/>
+            <a:endParaRPr/>
           </a:p>
         </p:txBody>
       </p:sp>
@@ -3296,7 +3302,7 @@
 </p:sld>
 </file>
 
-<file path=ppt/slides/slide2.xml><?xml version="1.0" encoding="utf-8"?>
+<file path=ppt/slides/slide10.xml><?xml version="1.0" encoding="utf-8"?>
 <p:sld xmlns:a="http://schemas.openxmlformats.org/drawingml/2006/main" xmlns:p="http://schemas.openxmlformats.org/presentationml/2006/main" xmlns:r="http://schemas.openxmlformats.org/officeDocument/2006/relationships">
   <p:cSld>
     <p:spTree>
@@ -3378,7 +3384,7 @@
               </a:defRPr>
             </a:pPr>
             <a:r>
-              <a:t>¿Cuando tiene sentido blockchain enterprise?</a:t>
+              <a:t>Respuestas al repaso (1/2)</a:t>
             </a:r>
           </a:p>
         </p:txBody>
@@ -3460,7 +3466,55 @@
               </a:defRPr>
             </a:pPr>
             <a:r>
-              <a:t>Multiples organizaciones que necesitan compartir datos</a:t>
+              <a:t>1. Cuando tiene sentido blockchain enterprise (3 condiciones):</a:t>
+            </a:r>
+          </a:p>
+          <a:p>
+            <a:pPr lvl="1">
+              <a:spcAft>
+                <a:spcPts val="400"/>
+              </a:spcAft>
+              <a:defRPr sz="1700">
+                <a:solidFill>
+                  <a:srgbClr val="666666"/>
+                </a:solidFill>
+                <a:latin typeface="Calibri"/>
+              </a:defRPr>
+            </a:pPr>
+            <a:r>
+              <a:t>    Hay multiples organizaciones que necesitan compartir datos.</a:t>
+            </a:r>
+          </a:p>
+          <a:p>
+            <a:pPr lvl="1">
+              <a:spcAft>
+                <a:spcPts val="400"/>
+              </a:spcAft>
+              <a:defRPr sz="1700">
+                <a:solidFill>
+                  <a:srgbClr val="666666"/>
+                </a:solidFill>
+                <a:latin typeface="Calibri"/>
+              </a:defRPr>
+            </a:pPr>
+            <a:r>
+              <a:t>    Existe desconfianza mutua (ninguna quiere que otra controle la BD).</a:t>
+            </a:r>
+          </a:p>
+          <a:p>
+            <a:pPr lvl="1">
+              <a:spcAft>
+                <a:spcPts val="400"/>
+              </a:spcAft>
+              <a:defRPr sz="1700">
+                <a:solidFill>
+                  <a:srgbClr val="666666"/>
+                </a:solidFill>
+                <a:latin typeface="Calibri"/>
+              </a:defRPr>
+            </a:pPr>
+            <a:r>
+              <a:t>    La inmutabilidad/auditabilidad es critica (regulacion, compliance).</a:t>
             </a:r>
           </a:p>
           <a:p>
@@ -3476,7 +3530,71 @@
               </a:defRPr>
             </a:pPr>
             <a:r>
-              <a:t>Desconfianza mutua: ninguna quiere que otra controle la base de datos</a:t>
+              <a:t>2. Cuando NO tiene sentido (3 razones):</a:t>
+            </a:r>
+          </a:p>
+          <a:p>
+            <a:pPr lvl="1">
+              <a:spcAft>
+                <a:spcPts val="400"/>
+              </a:spcAft>
+              <a:defRPr sz="1700">
+                <a:solidFill>
+                  <a:srgbClr val="666666"/>
+                </a:solidFill>
+                <a:latin typeface="Calibri"/>
+              </a:defRPr>
+            </a:pPr>
+            <a:r>
+              <a:t>    Un solo actor gestiona todos los datos -&gt; BD tradicional.</a:t>
+            </a:r>
+          </a:p>
+          <a:p>
+            <a:pPr lvl="1">
+              <a:spcAft>
+                <a:spcPts val="400"/>
+              </a:spcAft>
+              <a:defRPr sz="1700">
+                <a:solidFill>
+                  <a:srgbClr val="666666"/>
+                </a:solidFill>
+                <a:latin typeface="Calibri"/>
+              </a:defRPr>
+            </a:pPr>
+            <a:r>
+              <a:t>    Los datos no se comparten entre orgs -&gt; APIs entre sistemas.</a:t>
+            </a:r>
+          </a:p>
+          <a:p>
+            <a:pPr lvl="1">
+              <a:spcAft>
+                <a:spcPts val="400"/>
+              </a:spcAft>
+              <a:defRPr sz="1700">
+                <a:solidFill>
+                  <a:srgbClr val="666666"/>
+                </a:solidFill>
+                <a:latin typeface="Calibri"/>
+              </a:defRPr>
+            </a:pPr>
+            <a:r>
+              <a:t>    No hay problema de confianza -&gt; SaaS compartido con permisos.</a:t>
+            </a:r>
+          </a:p>
+          <a:p>
+            <a:pPr lvl="1">
+              <a:spcAft>
+                <a:spcPts val="400"/>
+              </a:spcAft>
+              <a:defRPr sz="1700">
+                <a:solidFill>
+                  <a:srgbClr val="666666"/>
+                </a:solidFill>
+                <a:latin typeface="Calibri"/>
+              </a:defRPr>
+            </a:pPr>
+            <a:r>
+              <a:t>    (Tambien: si el rendimiento es critico &gt;10k TPS).</a:t>
             </a:r>
           </a:p>
           <a:p>
@@ -3492,84 +3610,87 @@
               </a:defRPr>
             </a:pPr>
             <a:r>
-              <a:t>Necesidad de trazabilidad inmutable (regulacion, auditoria, compliance)</a:t>
-            </a:r>
-          </a:p>
-          <a:p>
-            <a:pPr>
-              <a:spcAft>
-                <a:spcPts val="800"/>
-              </a:spcAft>
-              <a:defRPr sz="2000">
-                <a:solidFill>
-                  <a:srgbClr val="333333"/>
-                </a:solidFill>
-                <a:latin typeface="Calibri"/>
-              </a:defRPr>
-            </a:pPr>
-            <a:r>
-              <a:t>Reglas de negocio que deben ser verificables por todos los participantes</a:t>
-            </a:r>
-          </a:p>
-          <a:p>
-            <a:pPr>
-              <a:spcAft>
-                <a:spcPts val="800"/>
-              </a:spcAft>
-              <a:defRPr sz="2000">
-                <a:solidFill>
-                  <a:srgbClr val="333333"/>
-                </a:solidFill>
-                <a:latin typeface="Calibri"/>
-              </a:defRPr>
-            </a:pPr>
-            <a:r>
-              <a:t>Transacciones entre partes que hoy requieren intermediarios costosos</a:t>
-            </a:r>
-          </a:p>
-          <a:p>
-            <a:pPr>
-              <a:spcAft>
-                <a:spcPts val="800"/>
-              </a:spcAft>
-              <a:defRPr sz="2000">
-                <a:solidFill>
-                  <a:srgbClr val="333333"/>
-                </a:solidFill>
-                <a:latin typeface="Calibri"/>
-              </a:defRPr>
-            </a:pPr>
-          </a:p>
-          <a:p>
-            <a:pPr>
-              <a:spcAft>
-                <a:spcPts val="800"/>
-              </a:spcAft>
-              <a:defRPr sz="2000">
-                <a:solidFill>
-                  <a:srgbClr val="333333"/>
-                </a:solidFill>
-                <a:latin typeface="Calibri"/>
-              </a:defRPr>
-            </a:pPr>
-            <a:r>
-              <a:t>Si se cumplen TODAS estas condiciones, blockchain aporta valor.</a:t>
-            </a:r>
-          </a:p>
-          <a:p>
-            <a:pPr>
-              <a:spcAft>
-                <a:spcPts val="800"/>
-              </a:spcAft>
-              <a:defRPr sz="2000">
-                <a:solidFill>
-                  <a:srgbClr val="333333"/>
-                </a:solidFill>
-                <a:latin typeface="Calibri"/>
-              </a:defRPr>
-            </a:pPr>
-            <a:r>
-              <a:t>Si falta alguna, probablemente hay una solucion mas sencilla.</a:t>
+              <a:t>3. Como presentarlo a un comite de direccion:</a:t>
+            </a:r>
+          </a:p>
+          <a:p>
+            <a:pPr lvl="1">
+              <a:spcAft>
+                <a:spcPts val="400"/>
+              </a:spcAft>
+              <a:defRPr sz="1700">
+                <a:solidFill>
+                  <a:srgbClr val="666666"/>
+                </a:solidFill>
+                <a:latin typeface="Calibri"/>
+              </a:defRPr>
+            </a:pPr>
+            <a:r>
+              <a:t>    Empezar por EL PROBLEMA de negocio, no por la tecnologia.</a:t>
+            </a:r>
+          </a:p>
+          <a:p>
+            <a:pPr lvl="1">
+              <a:spcAft>
+                <a:spcPts val="400"/>
+              </a:spcAft>
+              <a:defRPr sz="1700">
+                <a:solidFill>
+                  <a:srgbClr val="666666"/>
+                </a:solidFill>
+                <a:latin typeface="Calibri"/>
+              </a:defRPr>
+            </a:pPr>
+            <a:r>
+              <a:t>    Cuantificar el coste actual (euros, tiempo, fraude).</a:t>
+            </a:r>
+          </a:p>
+          <a:p>
+            <a:pPr lvl="1">
+              <a:spcAft>
+                <a:spcPts val="400"/>
+              </a:spcAft>
+              <a:defRPr sz="1700">
+                <a:solidFill>
+                  <a:srgbClr val="666666"/>
+                </a:solidFill>
+                <a:latin typeface="Calibri"/>
+              </a:defRPr>
+            </a:pPr>
+            <a:r>
+              <a:t>    Por que las soluciones actuales no funcionan.</a:t>
+            </a:r>
+          </a:p>
+          <a:p>
+            <a:pPr lvl="1">
+              <a:spcAft>
+                <a:spcPts val="400"/>
+              </a:spcAft>
+              <a:defRPr sz="1700">
+                <a:solidFill>
+                  <a:srgbClr val="666666"/>
+                </a:solidFill>
+                <a:latin typeface="Calibri"/>
+              </a:defRPr>
+            </a:pPr>
+            <a:r>
+              <a:t>    Propuesta: 'registro distribuido compartido' (evita la palabra 'blockchain').</a:t>
+            </a:r>
+          </a:p>
+          <a:p>
+            <a:pPr lvl="1">
+              <a:spcAft>
+                <a:spcPts val="400"/>
+              </a:spcAft>
+              <a:defRPr sz="1700">
+                <a:solidFill>
+                  <a:srgbClr val="666666"/>
+                </a:solidFill>
+                <a:latin typeface="Calibri"/>
+              </a:defRPr>
+            </a:pPr>
+            <a:r>
+              <a:t>    Socios potenciales, ROI estimado, riesgos y mitigaciones.</a:t>
             </a:r>
           </a:p>
         </p:txBody>
@@ -3582,7 +3703,7 @@
 </p:sld>
 </file>
 
-<file path=ppt/slides/slide3.xml><?xml version="1.0" encoding="utf-8"?>
+<file path=ppt/slides/slide11.xml><?xml version="1.0" encoding="utf-8"?>
 <p:sld xmlns:a="http://schemas.openxmlformats.org/drawingml/2006/main" xmlns:p="http://schemas.openxmlformats.org/presentationml/2006/main" xmlns:r="http://schemas.openxmlformats.org/officeDocument/2006/relationships">
   <p:cSld>
     <p:spTree>
@@ -3664,7 +3785,7 @@
               </a:defRPr>
             </a:pPr>
             <a:r>
-              <a:t>¿Cuando NO tiene sentido?</a:t>
+              <a:t>Respuestas al repaso (2/2)</a:t>
             </a:r>
           </a:p>
         </p:txBody>
@@ -3746,7 +3867,87 @@
               </a:defRPr>
             </a:pPr>
             <a:r>
-              <a:t>Un solo actor gestiona todos los datos (usa una base de datos)</a:t>
+              <a:t>4. Metricas para medir el exito:</a:t>
+            </a:r>
+          </a:p>
+          <a:p>
+            <a:pPr lvl="1">
+              <a:spcAft>
+                <a:spcPts val="400"/>
+              </a:spcAft>
+              <a:defRPr sz="1700">
+                <a:solidFill>
+                  <a:srgbClr val="666666"/>
+                </a:solidFill>
+                <a:latin typeface="Calibri"/>
+              </a:defRPr>
+            </a:pPr>
+            <a:r>
+              <a:t>    Eficiencia: tiempo de proceso reducido (dias/semanas -&gt; segundos/horas).</a:t>
+            </a:r>
+          </a:p>
+          <a:p>
+            <a:pPr lvl="1">
+              <a:spcAft>
+                <a:spcPts val="400"/>
+              </a:spcAft>
+              <a:defRPr sz="1700">
+                <a:solidFill>
+                  <a:srgbClr val="666666"/>
+                </a:solidFill>
+                <a:latin typeface="Calibri"/>
+              </a:defRPr>
+            </a:pPr>
+            <a:r>
+              <a:t>    Errores: reduccion de errores manuales y disputas.</a:t>
+            </a:r>
+          </a:p>
+          <a:p>
+            <a:pPr lvl="1">
+              <a:spcAft>
+                <a:spcPts val="400"/>
+              </a:spcAft>
+              <a:defRPr sz="1700">
+                <a:solidFill>
+                  <a:srgbClr val="666666"/>
+                </a:solidFill>
+                <a:latin typeface="Calibri"/>
+              </a:defRPr>
+            </a:pPr>
+            <a:r>
+              <a:t>    Fraude: casos detectados/evitados antes de su impacto.</a:t>
+            </a:r>
+          </a:p>
+          <a:p>
+            <a:pPr lvl="1">
+              <a:spcAft>
+                <a:spcPts val="400"/>
+              </a:spcAft>
+              <a:defRPr sz="1700">
+                <a:solidFill>
+                  <a:srgbClr val="666666"/>
+                </a:solidFill>
+                <a:latin typeface="Calibri"/>
+              </a:defRPr>
+            </a:pPr>
+            <a:r>
+              <a:t>    Costes: intermediarios eliminados, auditorias mas baratas.</a:t>
+            </a:r>
+          </a:p>
+          <a:p>
+            <a:pPr lvl="1">
+              <a:spcAft>
+                <a:spcPts val="400"/>
+              </a:spcAft>
+              <a:defRPr sz="1700">
+                <a:solidFill>
+                  <a:srgbClr val="666666"/>
+                </a:solidFill>
+                <a:latin typeface="Calibri"/>
+              </a:defRPr>
+            </a:pPr>
+            <a:r>
+              <a:t>    Payback: tiempo para recuperar la inversion inicial.</a:t>
             </a:r>
           </a:p>
           <a:p>
@@ -3762,116 +3963,87 @@
               </a:defRPr>
             </a:pPr>
             <a:r>
-              <a:t>Los datos no se comparten entre organizaciones (usa APIs)</a:t>
-            </a:r>
-          </a:p>
-          <a:p>
-            <a:pPr>
-              <a:spcAft>
-                <a:spcPts val="800"/>
-              </a:spcAft>
-              <a:defRPr sz="2000">
-                <a:solidFill>
-                  <a:srgbClr val="333333"/>
-                </a:solidFill>
-                <a:latin typeface="Calibri"/>
-              </a:defRPr>
-            </a:pPr>
-            <a:r>
-              <a:t>El rendimiento es critico y necesitas miles de TPS con baja latencia</a:t>
-            </a:r>
-          </a:p>
-          <a:p>
-            <a:pPr>
-              <a:spcAft>
-                <a:spcPts val="800"/>
-              </a:spcAft>
-              <a:defRPr sz="2000">
-                <a:solidFill>
-                  <a:srgbClr val="333333"/>
-                </a:solidFill>
-                <a:latin typeface="Calibri"/>
-              </a:defRPr>
-            </a:pPr>
-            <a:r>
-              <a:t>Los datos necesitan ser editables o borrables (GDPR, derecho al olvido)</a:t>
-            </a:r>
-          </a:p>
-          <a:p>
-            <a:pPr>
-              <a:spcAft>
-                <a:spcPts val="800"/>
-              </a:spcAft>
-              <a:defRPr sz="2000">
-                <a:solidFill>
-                  <a:srgbClr val="333333"/>
-                </a:solidFill>
-                <a:latin typeface="Calibri"/>
-              </a:defRPr>
-            </a:pPr>
-            <a:r>
-              <a:t>No hay problema de confianza entre las partes (usa un SaaS compartido)</a:t>
-            </a:r>
-          </a:p>
-          <a:p>
-            <a:pPr>
-              <a:spcAft>
-                <a:spcPts val="800"/>
-              </a:spcAft>
-              <a:defRPr sz="2000">
-                <a:solidFill>
-                  <a:srgbClr val="333333"/>
-                </a:solidFill>
-                <a:latin typeface="Calibri"/>
-              </a:defRPr>
-            </a:pPr>
-            <a:r>
-              <a:t>El coste de montar y mantener la red no compensa el beneficio</a:t>
-            </a:r>
-          </a:p>
-          <a:p>
-            <a:pPr>
-              <a:spcAft>
-                <a:spcPts val="800"/>
-              </a:spcAft>
-              <a:defRPr sz="2000">
-                <a:solidFill>
-                  <a:srgbClr val="333333"/>
-                </a:solidFill>
-                <a:latin typeface="Calibri"/>
-              </a:defRPr>
-            </a:pPr>
-          </a:p>
-          <a:p>
-            <a:pPr>
-              <a:spcAft>
-                <a:spcPts val="800"/>
-              </a:spcAft>
-              <a:defRPr sz="2000">
-                <a:solidFill>
-                  <a:srgbClr val="333333"/>
-                </a:solidFill>
-                <a:latin typeface="Calibri"/>
-              </a:defRPr>
-            </a:pPr>
-            <a:r>
-              <a:t>Blockchain NO es la solucion a todo. Saber cuando NO usarlo</a:t>
-            </a:r>
-          </a:p>
-          <a:p>
-            <a:pPr>
-              <a:spcAft>
-                <a:spcPts val="800"/>
-              </a:spcAft>
-              <a:defRPr sz="2000">
-                <a:solidFill>
-                  <a:srgbClr val="333333"/>
-                </a:solidFill>
-                <a:latin typeface="Calibri"/>
-              </a:defRPr>
-            </a:pPr>
-            <a:r>
-              <a:t>es tan importante como saber cuando si.</a:t>
+              <a:t>5. ¿Por que no empezar con la palabra 'blockchain'?</a:t>
+            </a:r>
+          </a:p>
+          <a:p>
+            <a:pPr lvl="1">
+              <a:spcAft>
+                <a:spcPts val="400"/>
+              </a:spcAft>
+              <a:defRPr sz="1700">
+                <a:solidFill>
+                  <a:srgbClr val="666666"/>
+                </a:solidFill>
+                <a:latin typeface="Calibri"/>
+              </a:defRPr>
+            </a:pPr>
+            <a:r>
+              <a:t>    'Blockchain' genera ruido: se asocia con cripto, especulacion, scams.</a:t>
+            </a:r>
+          </a:p>
+          <a:p>
+            <a:pPr lvl="1">
+              <a:spcAft>
+                <a:spcPts val="400"/>
+              </a:spcAft>
+              <a:defRPr sz="1700">
+                <a:solidFill>
+                  <a:srgbClr val="666666"/>
+                </a:solidFill>
+                <a:latin typeface="Calibri"/>
+              </a:defRPr>
+            </a:pPr>
+            <a:r>
+              <a:t>    Los directivos no tecnicos pueden cerrarse antes de entender el problema.</a:t>
+            </a:r>
+          </a:p>
+          <a:p>
+            <a:pPr lvl="1">
+              <a:spcAft>
+                <a:spcPts val="400"/>
+              </a:spcAft>
+              <a:defRPr sz="1700">
+                <a:solidFill>
+                  <a:srgbClr val="666666"/>
+                </a:solidFill>
+                <a:latin typeface="Calibri"/>
+              </a:defRPr>
+            </a:pPr>
+            <a:r>
+              <a:t>    Mejor: 'registro distribuido', 'ledger compartido', 'plataforma colaborativa'.</a:t>
+            </a:r>
+          </a:p>
+          <a:p>
+            <a:pPr lvl="1">
+              <a:spcAft>
+                <a:spcPts val="400"/>
+              </a:spcAft>
+              <a:defRPr sz="1700">
+                <a:solidFill>
+                  <a:srgbClr val="666666"/>
+                </a:solidFill>
+                <a:latin typeface="Calibri"/>
+              </a:defRPr>
+            </a:pPr>
+            <a:r>
+              <a:t>    Presenta la SOLUCION a su problema, no la tecnologia.</a:t>
+            </a:r>
+          </a:p>
+          <a:p>
+            <a:pPr lvl="1">
+              <a:spcAft>
+                <a:spcPts val="400"/>
+              </a:spcAft>
+              <a:defRPr sz="1700">
+                <a:solidFill>
+                  <a:srgbClr val="666666"/>
+                </a:solidFill>
+                <a:latin typeface="Calibri"/>
+              </a:defRPr>
+            </a:pPr>
+            <a:r>
+              <a:t>    Despues de aprobacion, explicar que la tecnologia base es blockchain/Fabric.</a:t>
             </a:r>
           </a:p>
         </p:txBody>
@@ -3884,8 +4056,8 @@
 </p:sld>
 </file>
 
-<file path=ppt/slides/slide4.xml><?xml version="1.0" encoding="utf-8"?>
-<p:sld xmlns:a="http://schemas.openxmlformats.org/drawingml/2006/main" xmlns:p="http://schemas.openxmlformats.org/presentationml/2006/main" xmlns:r="http://schemas.openxmlformats.org/officeDocument/2006/relationships">
+<file path=ppt/slides/slide2.xml><?xml version="1.0" encoding="utf-8"?>
+<p:sld xmlns:a="http://schemas.openxmlformats.org/drawingml/2006/main" xmlns:r="http://schemas.openxmlformats.org/officeDocument/2006/relationships" xmlns:p="http://schemas.openxmlformats.org/presentationml/2006/main">
   <p:cSld>
     <p:spTree>
       <p:nvGrpSpPr>
@@ -3893,7 +4065,14 @@
         <p:cNvGrpSpPr/>
         <p:nvPr/>
       </p:nvGrpSpPr>
-      <p:grpSpPr/>
+      <p:grpSpPr>
+        <a:xfrm>
+          <a:off x="0" y="0"/>
+          <a:ext cx="0" cy="0"/>
+          <a:chOff x="0" y="0"/>
+          <a:chExt cx="0" cy="0"/>
+        </a:xfrm>
+      </p:grpSpPr>
       <p:sp>
         <p:nvSpPr>
           <p:cNvPr id="2" name="Rectangle 1"/>
@@ -3934,6 +4113,7 @@
           <a:lstStyle/>
           <a:p>
             <a:pPr algn="ctr"/>
+            <a:endParaRPr/>
           </a:p>
         </p:txBody>
       </p:sp>
@@ -3966,7 +4146,7 @@
               </a:defRPr>
             </a:pPr>
             <a:r>
-              <a:t>Oportunidades por sector</a:t>
+              <a:t>¿Cuando tiene sentido blockchain enterprise?</a:t>
             </a:r>
           </a:p>
         </p:txBody>
@@ -4011,6 +4191,7 @@
           <a:lstStyle/>
           <a:p>
             <a:pPr algn="ctr"/>
+            <a:endParaRPr/>
           </a:p>
         </p:txBody>
       </p:sp>
@@ -4048,7 +4229,7 @@
               </a:defRPr>
             </a:pPr>
             <a:r>
-              <a:t>Finanzas: liquidacion, trade finance, tokenizacion de activos, KYC compartido</a:t>
+              <a:t>Multiples organizaciones que necesitan compartir datos</a:t>
             </a:r>
           </a:p>
           <a:p>
@@ -4064,7 +4245,7 @@
               </a:defRPr>
             </a:pPr>
             <a:r>
-              <a:t>Supply chain: trazabilidad, certificacion de origen, cold chain</a:t>
+              <a:t>Desconfianza mutua: ninguna quiere que otra controle la base de datos</a:t>
             </a:r>
           </a:p>
           <a:p>
@@ -4080,7 +4261,7 @@
               </a:defRPr>
             </a:pPr>
             <a:r>
-              <a:t>Salud: historiales compartidos, trazabilidad de farmacos, ensayos clinicos</a:t>
+              <a:t>Necesidad de trazabilidad inmutable (regulacion, auditoria, compliance)</a:t>
             </a:r>
           </a:p>
           <a:p>
@@ -4096,7 +4277,7 @@
               </a:defRPr>
             </a:pPr>
             <a:r>
-              <a:t>Administracion publica: registro de propiedad, licitaciones, subvenciones</a:t>
+              <a:t>Reglas de negocio que deben ser verificables por todos los participantes</a:t>
             </a:r>
           </a:p>
           <a:p>
@@ -4112,7 +4293,7 @@
               </a:defRPr>
             </a:pPr>
             <a:r>
-              <a:t>Energia: certificados de origen renovable, mercados P2P de energia</a:t>
+              <a:t>Transacciones entre partes que hoy requieren intermediarios costosos</a:t>
             </a:r>
           </a:p>
           <a:p>
@@ -4127,9 +4308,7 @@
                 <a:latin typeface="Calibri"/>
               </a:defRPr>
             </a:pPr>
-            <a:r>
-              <a:t>Seguros: reaseguros automatizados, gestion de siniestros multi-aseguradora</a:t>
-            </a:r>
+            <a:endParaRPr/>
           </a:p>
           <a:p>
             <a:pPr>
@@ -4144,7 +4323,23 @@
               </a:defRPr>
             </a:pPr>
             <a:r>
-              <a:t>Educacion: titulos verificables, credenciales profesionales</a:t>
+              <a:t>Si se cumplen TODAS estas condiciones, blockchain aporta valor.</a:t>
+            </a:r>
+          </a:p>
+          <a:p>
+            <a:pPr>
+              <a:spcAft>
+                <a:spcPts val="800"/>
+              </a:spcAft>
+              <a:defRPr sz="2000">
+                <a:solidFill>
+                  <a:srgbClr val="333333"/>
+                </a:solidFill>
+                <a:latin typeface="Calibri"/>
+              </a:defRPr>
+            </a:pPr>
+            <a:r>
+              <a:t>Si falta alguna, probablemente hay una solucion mas sencilla.</a:t>
             </a:r>
           </a:p>
         </p:txBody>
@@ -4157,8 +4352,8 @@
 </p:sld>
 </file>
 
-<file path=ppt/slides/slide5.xml><?xml version="1.0" encoding="utf-8"?>
-<p:sld xmlns:a="http://schemas.openxmlformats.org/drawingml/2006/main" xmlns:p="http://schemas.openxmlformats.org/presentationml/2006/main" xmlns:r="http://schemas.openxmlformats.org/officeDocument/2006/relationships">
+<file path=ppt/slides/slide3.xml><?xml version="1.0" encoding="utf-8"?>
+<p:sld xmlns:a="http://schemas.openxmlformats.org/drawingml/2006/main" xmlns:r="http://schemas.openxmlformats.org/officeDocument/2006/relationships" xmlns:p="http://schemas.openxmlformats.org/presentationml/2006/main">
   <p:cSld>
     <p:spTree>
       <p:nvGrpSpPr>
@@ -4166,7 +4361,14 @@
         <p:cNvGrpSpPr/>
         <p:nvPr/>
       </p:nvGrpSpPr>
-      <p:grpSpPr/>
+      <p:grpSpPr>
+        <a:xfrm>
+          <a:off x="0" y="0"/>
+          <a:ext cx="0" cy="0"/>
+          <a:chOff x="0" y="0"/>
+          <a:chExt cx="0" cy="0"/>
+        </a:xfrm>
+      </p:grpSpPr>
       <p:sp>
         <p:nvSpPr>
           <p:cNvPr id="2" name="Rectangle 1"/>
@@ -4207,6 +4409,7 @@
           <a:lstStyle/>
           <a:p>
             <a:pPr algn="ctr"/>
+            <a:endParaRPr/>
           </a:p>
         </p:txBody>
       </p:sp>
@@ -4239,7 +4442,7 @@
               </a:defRPr>
             </a:pPr>
             <a:r>
-              <a:t>Como presentar un proyecto blockchain al comite de direccion</a:t>
+              <a:t>¿Cuando NO tiene sentido?</a:t>
             </a:r>
           </a:p>
         </p:txBody>
@@ -4284,6 +4487,7 @@
           <a:lstStyle/>
           <a:p>
             <a:pPr algn="ctr"/>
+            <a:endParaRPr/>
           </a:p>
         </p:txBody>
       </p:sp>
@@ -4321,7 +4525,7 @@
               </a:defRPr>
             </a:pPr>
             <a:r>
-              <a:t>NO empieces por la tecnologia. Empieza por el problema de negocio:</a:t>
+              <a:t>Un solo actor gestiona todos los datos (usa una base de datos)</a:t>
             </a:r>
           </a:p>
           <a:p>
@@ -4336,6 +4540,9 @@
                 <a:latin typeface="Calibri"/>
               </a:defRPr>
             </a:pPr>
+            <a:r>
+              <a:t>Los datos no se comparten entre organizaciones (usa APIs)</a:t>
+            </a:r>
           </a:p>
           <a:p>
             <a:pPr>
@@ -4350,7 +4557,7 @@
               </a:defRPr>
             </a:pPr>
             <a:r>
-              <a:t>1. ¿Cual es el problema? (coste, tiempo, fraude, desconfianza)</a:t>
+              <a:t>El rendimiento es critico y necesitas miles de TPS con baja latencia</a:t>
             </a:r>
           </a:p>
           <a:p>
@@ -4366,7 +4573,7 @@
               </a:defRPr>
             </a:pPr>
             <a:r>
-              <a:t>2. ¿Cuanto nos cuesta hoy? (euros, dias, riesgo)</a:t>
+              <a:t>Los datos necesitan ser editables o borrables (GDPR, derecho al olvido)</a:t>
             </a:r>
           </a:p>
           <a:p>
@@ -4382,7 +4589,7 @@
               </a:defRPr>
             </a:pPr>
             <a:r>
-              <a:t>3. ¿Por que las soluciones actuales no funcionan? (intermediarios, silos)</a:t>
+              <a:t>No hay problema de confianza entre las partes (usa un SaaS compartido)</a:t>
             </a:r>
           </a:p>
           <a:p>
@@ -4398,7 +4605,7 @@
               </a:defRPr>
             </a:pPr>
             <a:r>
-              <a:t>4. ¿Que propones? (consorcio + ledger compartido — sin decir 'blockchain' aun)</a:t>
+              <a:t>El coste de montar y mantener la red no compensa el beneficio</a:t>
             </a:r>
           </a:p>
           <a:p>
@@ -4413,9 +4620,7 @@
                 <a:latin typeface="Calibri"/>
               </a:defRPr>
             </a:pPr>
-            <a:r>
-              <a:t>5. ¿Con quien lo hariamos? (socios del consorcio)</a:t>
-            </a:r>
+            <a:endParaRPr/>
           </a:p>
           <a:p>
             <a:pPr>
@@ -4430,7 +4635,7 @@
               </a:defRPr>
             </a:pPr>
             <a:r>
-              <a:t>6. ¿Cuanto cuesta y cuanto ahorra? (ROI, payback)</a:t>
+              <a:t>Blockchain NO es la solucion a todo. Saber cuando NO usarlo</a:t>
             </a:r>
           </a:p>
           <a:p>
@@ -4446,36 +4651,7 @@
               </a:defRPr>
             </a:pPr>
             <a:r>
-              <a:t>7. ¿Que riesgos tiene? (y como los mitigamos)</a:t>
-            </a:r>
-          </a:p>
-          <a:p>
-            <a:pPr>
-              <a:spcAft>
-                <a:spcPts val="800"/>
-              </a:spcAft>
-              <a:defRPr sz="2000">
-                <a:solidFill>
-                  <a:srgbClr val="333333"/>
-                </a:solidFill>
-                <a:latin typeface="Calibri"/>
-              </a:defRPr>
-            </a:pPr>
-          </a:p>
-          <a:p>
-            <a:pPr>
-              <a:spcAft>
-                <a:spcPts val="800"/>
-              </a:spcAft>
-              <a:defRPr sz="2000">
-                <a:solidFill>
-                  <a:srgbClr val="333333"/>
-                </a:solidFill>
-                <a:latin typeface="Calibri"/>
-              </a:defRPr>
-            </a:pPr>
-            <a:r>
-              <a:t>Consejo: la palabra 'blockchain' genera ruido. Usa 'registro distribuido compartido'.</a:t>
+              <a:t>es tan importante como saber cuando si.</a:t>
             </a:r>
           </a:p>
         </p:txBody>
@@ -4488,8 +4664,8 @@
 </p:sld>
 </file>
 
-<file path=ppt/slides/slide6.xml><?xml version="1.0" encoding="utf-8"?>
-<p:sld xmlns:a="http://schemas.openxmlformats.org/drawingml/2006/main" xmlns:p="http://schemas.openxmlformats.org/presentationml/2006/main" xmlns:r="http://schemas.openxmlformats.org/officeDocument/2006/relationships">
+<file path=ppt/slides/slide4.xml><?xml version="1.0" encoding="utf-8"?>
+<p:sld xmlns:a="http://schemas.openxmlformats.org/drawingml/2006/main" xmlns:r="http://schemas.openxmlformats.org/officeDocument/2006/relationships" xmlns:p="http://schemas.openxmlformats.org/presentationml/2006/main">
   <p:cSld>
     <p:spTree>
       <p:nvGrpSpPr>
@@ -4497,7 +4673,14 @@
         <p:cNvGrpSpPr/>
         <p:nvPr/>
       </p:nvGrpSpPr>
-      <p:grpSpPr/>
+      <p:grpSpPr>
+        <a:xfrm>
+          <a:off x="0" y="0"/>
+          <a:ext cx="0" cy="0"/>
+          <a:chOff x="0" y="0"/>
+          <a:chExt cx="0" cy="0"/>
+        </a:xfrm>
+      </p:grpSpPr>
       <p:sp>
         <p:nvSpPr>
           <p:cNvPr id="2" name="Rectangle 1"/>
@@ -4538,6 +4721,7 @@
           <a:lstStyle/>
           <a:p>
             <a:pPr algn="ctr"/>
+            <a:endParaRPr/>
           </a:p>
         </p:txBody>
       </p:sp>
@@ -4570,7 +4754,7 @@
               </a:defRPr>
             </a:pPr>
             <a:r>
-              <a:t>ROI y metricas: ¿como mides el exito?</a:t>
+              <a:t>Oportunidades por sector</a:t>
             </a:r>
           </a:p>
         </p:txBody>
@@ -4615,6 +4799,7 @@
           <a:lstStyle/>
           <a:p>
             <a:pPr algn="ctr"/>
+            <a:endParaRPr/>
           </a:p>
         </p:txBody>
       </p:sp>
@@ -4652,6 +4837,630 @@
               </a:defRPr>
             </a:pPr>
             <a:r>
+              <a:t>Finanzas: liquidacion, trade finance, tokenizacion de activos, KYC compartido</a:t>
+            </a:r>
+          </a:p>
+          <a:p>
+            <a:pPr>
+              <a:spcAft>
+                <a:spcPts val="800"/>
+              </a:spcAft>
+              <a:defRPr sz="2000">
+                <a:solidFill>
+                  <a:srgbClr val="333333"/>
+                </a:solidFill>
+                <a:latin typeface="Calibri"/>
+              </a:defRPr>
+            </a:pPr>
+            <a:r>
+              <a:t>Supply chain: trazabilidad, certificacion de origen, cold chain</a:t>
+            </a:r>
+          </a:p>
+          <a:p>
+            <a:pPr>
+              <a:spcAft>
+                <a:spcPts val="800"/>
+              </a:spcAft>
+              <a:defRPr sz="2000">
+                <a:solidFill>
+                  <a:srgbClr val="333333"/>
+                </a:solidFill>
+                <a:latin typeface="Calibri"/>
+              </a:defRPr>
+            </a:pPr>
+            <a:r>
+              <a:t>Salud: historiales compartidos, trazabilidad de farmacos, ensayos clinicos</a:t>
+            </a:r>
+          </a:p>
+          <a:p>
+            <a:pPr>
+              <a:spcAft>
+                <a:spcPts val="800"/>
+              </a:spcAft>
+              <a:defRPr sz="2000">
+                <a:solidFill>
+                  <a:srgbClr val="333333"/>
+                </a:solidFill>
+                <a:latin typeface="Calibri"/>
+              </a:defRPr>
+            </a:pPr>
+            <a:r>
+              <a:t>Administracion publica: registro de propiedad, licitaciones, subvenciones</a:t>
+            </a:r>
+          </a:p>
+          <a:p>
+            <a:pPr>
+              <a:spcAft>
+                <a:spcPts val="800"/>
+              </a:spcAft>
+              <a:defRPr sz="2000">
+                <a:solidFill>
+                  <a:srgbClr val="333333"/>
+                </a:solidFill>
+                <a:latin typeface="Calibri"/>
+              </a:defRPr>
+            </a:pPr>
+            <a:r>
+              <a:t>Energia: certificados de origen renovable, mercados P2P de energia</a:t>
+            </a:r>
+          </a:p>
+          <a:p>
+            <a:pPr>
+              <a:spcAft>
+                <a:spcPts val="800"/>
+              </a:spcAft>
+              <a:defRPr sz="2000">
+                <a:solidFill>
+                  <a:srgbClr val="333333"/>
+                </a:solidFill>
+                <a:latin typeface="Calibri"/>
+              </a:defRPr>
+            </a:pPr>
+            <a:r>
+              <a:t>Seguros: reaseguros automatizados, gestion de siniestros multi-aseguradora</a:t>
+            </a:r>
+          </a:p>
+          <a:p>
+            <a:pPr>
+              <a:spcAft>
+                <a:spcPts val="800"/>
+              </a:spcAft>
+              <a:defRPr sz="2000">
+                <a:solidFill>
+                  <a:srgbClr val="333333"/>
+                </a:solidFill>
+                <a:latin typeface="Calibri"/>
+              </a:defRPr>
+            </a:pPr>
+            <a:r>
+              <a:t>Educacion: titulos verificables, credenciales profesionales</a:t>
+            </a:r>
+          </a:p>
+        </p:txBody>
+      </p:sp>
+    </p:spTree>
+  </p:cSld>
+  <p:clrMapOvr>
+    <a:masterClrMapping/>
+  </p:clrMapOvr>
+</p:sld>
+</file>
+
+<file path=ppt/slides/slide5.xml><?xml version="1.0" encoding="utf-8"?>
+<p:sld xmlns:a="http://schemas.openxmlformats.org/drawingml/2006/main" xmlns:r="http://schemas.openxmlformats.org/officeDocument/2006/relationships" xmlns:p="http://schemas.openxmlformats.org/presentationml/2006/main">
+  <p:cSld>
+    <p:spTree>
+      <p:nvGrpSpPr>
+        <p:cNvPr id="1" name=""/>
+        <p:cNvGrpSpPr/>
+        <p:nvPr/>
+      </p:nvGrpSpPr>
+      <p:grpSpPr>
+        <a:xfrm>
+          <a:off x="0" y="0"/>
+          <a:ext cx="0" cy="0"/>
+          <a:chOff x="0" y="0"/>
+          <a:chExt cx="0" cy="0"/>
+        </a:xfrm>
+      </p:grpSpPr>
+      <p:sp>
+        <p:nvSpPr>
+          <p:cNvPr id="2" name="Rectangle 1"/>
+          <p:cNvSpPr/>
+          <p:nvPr/>
+        </p:nvSpPr>
+        <p:spPr>
+          <a:xfrm>
+            <a:off x="0" y="0"/>
+            <a:ext cx="12188952" cy="73152"/>
+          </a:xfrm>
+          <a:prstGeom prst="rect">
+            <a:avLst/>
+          </a:prstGeom>
+          <a:solidFill>
+            <a:srgbClr val="22627E"/>
+          </a:solidFill>
+          <a:ln>
+            <a:noFill/>
+          </a:ln>
+        </p:spPr>
+        <p:style>
+          <a:lnRef idx="1">
+            <a:schemeClr val="accent1"/>
+          </a:lnRef>
+          <a:fillRef idx="3">
+            <a:schemeClr val="accent1"/>
+          </a:fillRef>
+          <a:effectRef idx="2">
+            <a:schemeClr val="accent1"/>
+          </a:effectRef>
+          <a:fontRef idx="minor">
+            <a:schemeClr val="lt1"/>
+          </a:fontRef>
+        </p:style>
+        <p:txBody>
+          <a:bodyPr rtlCol="0" anchor="ctr"/>
+          <a:lstStyle/>
+          <a:p>
+            <a:pPr algn="ctr"/>
+            <a:endParaRPr/>
+          </a:p>
+        </p:txBody>
+      </p:sp>
+      <p:sp>
+        <p:nvSpPr>
+          <p:cNvPr id="3" name="TextBox 2"/>
+          <p:cNvSpPr txBox="1"/>
+          <p:nvPr/>
+        </p:nvSpPr>
+        <p:spPr>
+          <a:xfrm>
+            <a:off x="457200" y="274320"/>
+            <a:ext cx="10972800" cy="731520"/>
+          </a:xfrm>
+          <a:prstGeom prst="rect">
+            <a:avLst/>
+          </a:prstGeom>
+          <a:noFill/>
+        </p:spPr>
+        <p:txBody>
+          <a:bodyPr wrap="square"/>
+          <a:lstStyle/>
+          <a:p>
+            <a:pPr algn="l">
+              <a:defRPr sz="3200" b="1">
+                <a:solidFill>
+                  <a:srgbClr val="22627E"/>
+                </a:solidFill>
+                <a:latin typeface="Calibri"/>
+              </a:defRPr>
+            </a:pPr>
+            <a:r>
+              <a:t>Como presentar un proyecto blockchain al comite de direccion</a:t>
+            </a:r>
+          </a:p>
+        </p:txBody>
+      </p:sp>
+      <p:sp>
+        <p:nvSpPr>
+          <p:cNvPr id="4" name="Rectangle 3"/>
+          <p:cNvSpPr/>
+          <p:nvPr/>
+        </p:nvSpPr>
+        <p:spPr>
+          <a:xfrm>
+            <a:off x="457200" y="1051560"/>
+            <a:ext cx="10972800" cy="27432"/>
+          </a:xfrm>
+          <a:prstGeom prst="rect">
+            <a:avLst/>
+          </a:prstGeom>
+          <a:solidFill>
+            <a:srgbClr val="22627E"/>
+          </a:solidFill>
+          <a:ln>
+            <a:noFill/>
+          </a:ln>
+        </p:spPr>
+        <p:style>
+          <a:lnRef idx="1">
+            <a:schemeClr val="accent1"/>
+          </a:lnRef>
+          <a:fillRef idx="3">
+            <a:schemeClr val="accent1"/>
+          </a:fillRef>
+          <a:effectRef idx="2">
+            <a:schemeClr val="accent1"/>
+          </a:effectRef>
+          <a:fontRef idx="minor">
+            <a:schemeClr val="lt1"/>
+          </a:fontRef>
+        </p:style>
+        <p:txBody>
+          <a:bodyPr rtlCol="0" anchor="ctr"/>
+          <a:lstStyle/>
+          <a:p>
+            <a:pPr algn="ctr"/>
+            <a:endParaRPr/>
+          </a:p>
+        </p:txBody>
+      </p:sp>
+      <p:sp>
+        <p:nvSpPr>
+          <p:cNvPr id="5" name="TextBox 4"/>
+          <p:cNvSpPr txBox="1"/>
+          <p:nvPr/>
+        </p:nvSpPr>
+        <p:spPr>
+          <a:xfrm>
+            <a:off x="640080" y="1280160"/>
+            <a:ext cx="10515600" cy="5029200"/>
+          </a:xfrm>
+          <a:prstGeom prst="rect">
+            <a:avLst/>
+          </a:prstGeom>
+          <a:noFill/>
+        </p:spPr>
+        <p:txBody>
+          <a:bodyPr wrap="square">
+            <a:spAutoFit/>
+          </a:bodyPr>
+          <a:lstStyle/>
+          <a:p>
+            <a:pPr>
+              <a:spcAft>
+                <a:spcPts val="800"/>
+              </a:spcAft>
+              <a:defRPr sz="2000">
+                <a:solidFill>
+                  <a:srgbClr val="333333"/>
+                </a:solidFill>
+                <a:latin typeface="Calibri"/>
+              </a:defRPr>
+            </a:pPr>
+            <a:r>
+              <a:t>NO empieces por la tecnologia. Empieza por el problema de negocio:</a:t>
+            </a:r>
+          </a:p>
+          <a:p>
+            <a:pPr>
+              <a:spcAft>
+                <a:spcPts val="800"/>
+              </a:spcAft>
+              <a:defRPr sz="2000">
+                <a:solidFill>
+                  <a:srgbClr val="333333"/>
+                </a:solidFill>
+                <a:latin typeface="Calibri"/>
+              </a:defRPr>
+            </a:pPr>
+            <a:endParaRPr/>
+          </a:p>
+          <a:p>
+            <a:pPr>
+              <a:spcAft>
+                <a:spcPts val="800"/>
+              </a:spcAft>
+              <a:defRPr sz="2000">
+                <a:solidFill>
+                  <a:srgbClr val="333333"/>
+                </a:solidFill>
+                <a:latin typeface="Calibri"/>
+              </a:defRPr>
+            </a:pPr>
+            <a:r>
+              <a:t>1. ¿Cual es el problema? (coste, tiempo, fraude, desconfianza)</a:t>
+            </a:r>
+          </a:p>
+          <a:p>
+            <a:pPr>
+              <a:spcAft>
+                <a:spcPts val="800"/>
+              </a:spcAft>
+              <a:defRPr sz="2000">
+                <a:solidFill>
+                  <a:srgbClr val="333333"/>
+                </a:solidFill>
+                <a:latin typeface="Calibri"/>
+              </a:defRPr>
+            </a:pPr>
+            <a:r>
+              <a:t>2. ¿Cuanto nos cuesta hoy? (euros, dias, riesgo)</a:t>
+            </a:r>
+          </a:p>
+          <a:p>
+            <a:pPr>
+              <a:spcAft>
+                <a:spcPts val="800"/>
+              </a:spcAft>
+              <a:defRPr sz="2000">
+                <a:solidFill>
+                  <a:srgbClr val="333333"/>
+                </a:solidFill>
+                <a:latin typeface="Calibri"/>
+              </a:defRPr>
+            </a:pPr>
+            <a:r>
+              <a:t>3. ¿Por que las soluciones actuales no funcionan? (intermediarios, silos)</a:t>
+            </a:r>
+          </a:p>
+          <a:p>
+            <a:pPr>
+              <a:spcAft>
+                <a:spcPts val="800"/>
+              </a:spcAft>
+              <a:defRPr sz="2000">
+                <a:solidFill>
+                  <a:srgbClr val="333333"/>
+                </a:solidFill>
+                <a:latin typeface="Calibri"/>
+              </a:defRPr>
+            </a:pPr>
+            <a:r>
+              <a:t>4. ¿Que propones? (consorcio + ledger compartido — sin decir 'blockchain' aun)</a:t>
+            </a:r>
+          </a:p>
+          <a:p>
+            <a:pPr>
+              <a:spcAft>
+                <a:spcPts val="800"/>
+              </a:spcAft>
+              <a:defRPr sz="2000">
+                <a:solidFill>
+                  <a:srgbClr val="333333"/>
+                </a:solidFill>
+                <a:latin typeface="Calibri"/>
+              </a:defRPr>
+            </a:pPr>
+            <a:r>
+              <a:t>5. ¿Con quien lo hariamos? (socios del consorcio)</a:t>
+            </a:r>
+          </a:p>
+          <a:p>
+            <a:pPr>
+              <a:spcAft>
+                <a:spcPts val="800"/>
+              </a:spcAft>
+              <a:defRPr sz="2000">
+                <a:solidFill>
+                  <a:srgbClr val="333333"/>
+                </a:solidFill>
+                <a:latin typeface="Calibri"/>
+              </a:defRPr>
+            </a:pPr>
+            <a:r>
+              <a:t>6. ¿Cuanto cuesta y cuanto ahorra? (ROI, payback)</a:t>
+            </a:r>
+          </a:p>
+          <a:p>
+            <a:pPr>
+              <a:spcAft>
+                <a:spcPts val="800"/>
+              </a:spcAft>
+              <a:defRPr sz="2000">
+                <a:solidFill>
+                  <a:srgbClr val="333333"/>
+                </a:solidFill>
+                <a:latin typeface="Calibri"/>
+              </a:defRPr>
+            </a:pPr>
+            <a:r>
+              <a:t>7. ¿Que riesgos tiene? (y como los mitigamos)</a:t>
+            </a:r>
+          </a:p>
+          <a:p>
+            <a:pPr>
+              <a:spcAft>
+                <a:spcPts val="800"/>
+              </a:spcAft>
+              <a:defRPr sz="2000">
+                <a:solidFill>
+                  <a:srgbClr val="333333"/>
+                </a:solidFill>
+                <a:latin typeface="Calibri"/>
+              </a:defRPr>
+            </a:pPr>
+            <a:endParaRPr/>
+          </a:p>
+          <a:p>
+            <a:pPr>
+              <a:spcAft>
+                <a:spcPts val="800"/>
+              </a:spcAft>
+              <a:defRPr sz="2000">
+                <a:solidFill>
+                  <a:srgbClr val="333333"/>
+                </a:solidFill>
+                <a:latin typeface="Calibri"/>
+              </a:defRPr>
+            </a:pPr>
+            <a:r>
+              <a:t>Consejo: la palabra 'blockchain' genera ruido. Usa 'registro distribuido compartido'.</a:t>
+            </a:r>
+          </a:p>
+        </p:txBody>
+      </p:sp>
+    </p:spTree>
+  </p:cSld>
+  <p:clrMapOvr>
+    <a:masterClrMapping/>
+  </p:clrMapOvr>
+</p:sld>
+</file>
+
+<file path=ppt/slides/slide6.xml><?xml version="1.0" encoding="utf-8"?>
+<p:sld xmlns:a="http://schemas.openxmlformats.org/drawingml/2006/main" xmlns:r="http://schemas.openxmlformats.org/officeDocument/2006/relationships" xmlns:p="http://schemas.openxmlformats.org/presentationml/2006/main">
+  <p:cSld>
+    <p:spTree>
+      <p:nvGrpSpPr>
+        <p:cNvPr id="1" name=""/>
+        <p:cNvGrpSpPr/>
+        <p:nvPr/>
+      </p:nvGrpSpPr>
+      <p:grpSpPr>
+        <a:xfrm>
+          <a:off x="0" y="0"/>
+          <a:ext cx="0" cy="0"/>
+          <a:chOff x="0" y="0"/>
+          <a:chExt cx="0" cy="0"/>
+        </a:xfrm>
+      </p:grpSpPr>
+      <p:sp>
+        <p:nvSpPr>
+          <p:cNvPr id="2" name="Rectangle 1"/>
+          <p:cNvSpPr/>
+          <p:nvPr/>
+        </p:nvSpPr>
+        <p:spPr>
+          <a:xfrm>
+            <a:off x="0" y="0"/>
+            <a:ext cx="12188952" cy="73152"/>
+          </a:xfrm>
+          <a:prstGeom prst="rect">
+            <a:avLst/>
+          </a:prstGeom>
+          <a:solidFill>
+            <a:srgbClr val="22627E"/>
+          </a:solidFill>
+          <a:ln>
+            <a:noFill/>
+          </a:ln>
+        </p:spPr>
+        <p:style>
+          <a:lnRef idx="1">
+            <a:schemeClr val="accent1"/>
+          </a:lnRef>
+          <a:fillRef idx="3">
+            <a:schemeClr val="accent1"/>
+          </a:fillRef>
+          <a:effectRef idx="2">
+            <a:schemeClr val="accent1"/>
+          </a:effectRef>
+          <a:fontRef idx="minor">
+            <a:schemeClr val="lt1"/>
+          </a:fontRef>
+        </p:style>
+        <p:txBody>
+          <a:bodyPr rtlCol="0" anchor="ctr"/>
+          <a:lstStyle/>
+          <a:p>
+            <a:pPr algn="ctr"/>
+            <a:endParaRPr/>
+          </a:p>
+        </p:txBody>
+      </p:sp>
+      <p:sp>
+        <p:nvSpPr>
+          <p:cNvPr id="3" name="TextBox 2"/>
+          <p:cNvSpPr txBox="1"/>
+          <p:nvPr/>
+        </p:nvSpPr>
+        <p:spPr>
+          <a:xfrm>
+            <a:off x="457200" y="274320"/>
+            <a:ext cx="10972800" cy="731520"/>
+          </a:xfrm>
+          <a:prstGeom prst="rect">
+            <a:avLst/>
+          </a:prstGeom>
+          <a:noFill/>
+        </p:spPr>
+        <p:txBody>
+          <a:bodyPr wrap="square"/>
+          <a:lstStyle/>
+          <a:p>
+            <a:pPr algn="l">
+              <a:defRPr sz="3200" b="1">
+                <a:solidFill>
+                  <a:srgbClr val="22627E"/>
+                </a:solidFill>
+                <a:latin typeface="Calibri"/>
+              </a:defRPr>
+            </a:pPr>
+            <a:r>
+              <a:t>ROI y metricas: ¿como mides el exito?</a:t>
+            </a:r>
+          </a:p>
+        </p:txBody>
+      </p:sp>
+      <p:sp>
+        <p:nvSpPr>
+          <p:cNvPr id="4" name="Rectangle 3"/>
+          <p:cNvSpPr/>
+          <p:nvPr/>
+        </p:nvSpPr>
+        <p:spPr>
+          <a:xfrm>
+            <a:off x="457200" y="1051560"/>
+            <a:ext cx="10972800" cy="27432"/>
+          </a:xfrm>
+          <a:prstGeom prst="rect">
+            <a:avLst/>
+          </a:prstGeom>
+          <a:solidFill>
+            <a:srgbClr val="22627E"/>
+          </a:solidFill>
+          <a:ln>
+            <a:noFill/>
+          </a:ln>
+        </p:spPr>
+        <p:style>
+          <a:lnRef idx="1">
+            <a:schemeClr val="accent1"/>
+          </a:lnRef>
+          <a:fillRef idx="3">
+            <a:schemeClr val="accent1"/>
+          </a:fillRef>
+          <a:effectRef idx="2">
+            <a:schemeClr val="accent1"/>
+          </a:effectRef>
+          <a:fontRef idx="minor">
+            <a:schemeClr val="lt1"/>
+          </a:fontRef>
+        </p:style>
+        <p:txBody>
+          <a:bodyPr rtlCol="0" anchor="ctr"/>
+          <a:lstStyle/>
+          <a:p>
+            <a:pPr algn="ctr"/>
+            <a:endParaRPr/>
+          </a:p>
+        </p:txBody>
+      </p:sp>
+      <p:sp>
+        <p:nvSpPr>
+          <p:cNvPr id="5" name="TextBox 4"/>
+          <p:cNvSpPr txBox="1"/>
+          <p:nvPr/>
+        </p:nvSpPr>
+        <p:spPr>
+          <a:xfrm>
+            <a:off x="640080" y="1280160"/>
+            <a:ext cx="10515600" cy="5029200"/>
+          </a:xfrm>
+          <a:prstGeom prst="rect">
+            <a:avLst/>
+          </a:prstGeom>
+          <a:noFill/>
+        </p:spPr>
+        <p:txBody>
+          <a:bodyPr wrap="square">
+            <a:spAutoFit/>
+          </a:bodyPr>
+          <a:lstStyle/>
+          <a:p>
+            <a:pPr>
+              <a:spcAft>
+                <a:spcPts val="800"/>
+              </a:spcAft>
+              <a:defRPr sz="2000">
+                <a:solidFill>
+                  <a:srgbClr val="333333"/>
+                </a:solidFill>
+                <a:latin typeface="Calibri"/>
+              </a:defRPr>
+            </a:pPr>
+            <a:r>
               <a:t>Metricas de eficiencia:</a:t>
             </a:r>
           </a:p>
@@ -4842,7 +5651,7 @@
 </file>
 
 <file path=ppt/slides/slide7.xml><?xml version="1.0" encoding="utf-8"?>
-<p:sld xmlns:a="http://schemas.openxmlformats.org/drawingml/2006/main" xmlns:p="http://schemas.openxmlformats.org/presentationml/2006/main" xmlns:r="http://schemas.openxmlformats.org/officeDocument/2006/relationships">
+<p:sld xmlns:a="http://schemas.openxmlformats.org/drawingml/2006/main" xmlns:r="http://schemas.openxmlformats.org/officeDocument/2006/relationships" xmlns:p="http://schemas.openxmlformats.org/presentationml/2006/main">
   <p:cSld>
     <p:spTree>
       <p:nvGrpSpPr>
@@ -4850,7 +5659,14 @@
         <p:cNvGrpSpPr/>
         <p:nvPr/>
       </p:nvGrpSpPr>
-      <p:grpSpPr/>
+      <p:grpSpPr>
+        <a:xfrm>
+          <a:off x="0" y="0"/>
+          <a:ext cx="0" cy="0"/>
+          <a:chOff x="0" y="0"/>
+          <a:chExt cx="0" cy="0"/>
+        </a:xfrm>
+      </p:grpSpPr>
       <p:sp>
         <p:nvSpPr>
           <p:cNvPr id="2" name="Rectangle 1"/>
@@ -4891,6 +5707,7 @@
           <a:lstStyle/>
           <a:p>
             <a:pPr algn="ctr"/>
+            <a:endParaRPr/>
           </a:p>
         </p:txBody>
       </p:sp>
@@ -4934,6 +5751,7 @@
           <a:lstStyle/>
           <a:p>
             <a:pPr algn="ctr"/>
+            <a:endParaRPr/>
           </a:p>
         </p:txBody>
       </p:sp>
@@ -5045,6 +5863,7 @@
           <a:lstStyle/>
           <a:p>
             <a:pPr algn="ctr"/>
+            <a:endParaRPr/>
           </a:p>
         </p:txBody>
       </p:sp>
@@ -5097,6 +5916,7 @@
                 <a:latin typeface="Calibri"/>
               </a:defRPr>
             </a:pPr>
+            <a:endParaRPr/>
           </a:p>
           <a:p>
             <a:pPr>
@@ -5222,6 +6042,7 @@
                 <a:latin typeface="Calibri"/>
               </a:defRPr>
             </a:pPr>
+            <a:endParaRPr/>
           </a:p>
           <a:p>
             <a:pPr>
@@ -5266,7 +6087,7 @@
 </file>
 
 <file path=ppt/slides/slide8.xml><?xml version="1.0" encoding="utf-8"?>
-<p:sld xmlns:a="http://schemas.openxmlformats.org/drawingml/2006/main" xmlns:p="http://schemas.openxmlformats.org/presentationml/2006/main" xmlns:r="http://schemas.openxmlformats.org/officeDocument/2006/relationships">
+<p:sld xmlns:a="http://schemas.openxmlformats.org/drawingml/2006/main" xmlns:r="http://schemas.openxmlformats.org/officeDocument/2006/relationships" xmlns:p="http://schemas.openxmlformats.org/presentationml/2006/main">
   <p:cSld>
     <p:spTree>
       <p:nvGrpSpPr>
@@ -5274,7 +6095,14 @@
         <p:cNvGrpSpPr/>
         <p:nvPr/>
       </p:nvGrpSpPr>
-      <p:grpSpPr/>
+      <p:grpSpPr>
+        <a:xfrm>
+          <a:off x="0" y="0"/>
+          <a:ext cx="0" cy="0"/>
+          <a:chOff x="0" y="0"/>
+          <a:chExt cx="0" cy="0"/>
+        </a:xfrm>
+      </p:grpSpPr>
       <p:sp>
         <p:nvSpPr>
           <p:cNvPr id="2" name="Rectangle 1"/>
@@ -5315,6 +6143,7 @@
           <a:lstStyle/>
           <a:p>
             <a:pPr algn="ctr"/>
+            <a:endParaRPr/>
           </a:p>
         </p:txBody>
       </p:sp>
@@ -5358,6 +6187,7 @@
           <a:lstStyle/>
           <a:p>
             <a:pPr algn="ctr"/>
+            <a:endParaRPr/>
           </a:p>
         </p:txBody>
       </p:sp>
@@ -5469,6 +6299,7 @@
           <a:lstStyle/>
           <a:p>
             <a:pPr algn="ctr"/>
+            <a:endParaRPr/>
           </a:p>
         </p:txBody>
       </p:sp>
@@ -5481,7 +6312,7 @@
         <p:spPr>
           <a:xfrm>
             <a:off x="640080" y="1371600"/>
-            <a:ext cx="10515600" cy="5029200"/>
+            <a:ext cx="10515600" cy="4760278"/>
           </a:xfrm>
           <a:prstGeom prst="rect">
             <a:avLst/>
@@ -5506,7 +6337,32 @@
               </a:defRPr>
             </a:pPr>
             <a:r>
-              <a:t>Gartner publica cada ano su Hype Cycle for Blockchain and Web3.</a:t>
+              <a:rPr dirty="0"/>
+              <a:t>Gartner publica </a:t>
+            </a:r>
+            <a:r>
+              <a:rPr dirty="0" err="1"/>
+              <a:t>cada</a:t>
+            </a:r>
+            <a:r>
+              <a:rPr dirty="0"/>
+              <a:t> a</a:t>
+            </a:r>
+            <a:r>
+              <a:rPr lang="es-ES" dirty="0"/>
+              <a:t>ñ</a:t>
+            </a:r>
+            <a:r>
+              <a:rPr dirty="0"/>
+              <a:t>o </a:t>
+            </a:r>
+            <a:r>
+              <a:rPr dirty="0" err="1"/>
+              <a:t>su</a:t>
+            </a:r>
+            <a:r>
+              <a:rPr dirty="0"/>
+              <a:t> Hype Cycle for Blockchain and Web3.</a:t>
             </a:r>
           </a:p>
           <a:p>
@@ -5522,7 +6378,48 @@
               </a:defRPr>
             </a:pPr>
             <a:r>
-              <a:t>En 2017, blockchain estaba en el 'Pico de Expectativas Infladas'.</a:t>
+              <a:rPr dirty="0"/>
+              <a:t>En 2017, blockchain </a:t>
+            </a:r>
+            <a:r>
+              <a:rPr dirty="0" err="1"/>
+              <a:t>estaba</a:t>
+            </a:r>
+            <a:r>
+              <a:rPr dirty="0"/>
+              <a:t> </a:t>
+            </a:r>
+            <a:r>
+              <a:rPr dirty="0" err="1"/>
+              <a:t>en</a:t>
+            </a:r>
+            <a:r>
+              <a:rPr dirty="0"/>
+              <a:t> </a:t>
+            </a:r>
+            <a:r>
+              <a:rPr dirty="0" err="1"/>
+              <a:t>el</a:t>
+            </a:r>
+            <a:r>
+              <a:rPr dirty="0"/>
+              <a:t> 'Pico de </a:t>
+            </a:r>
+            <a:r>
+              <a:rPr dirty="0" err="1"/>
+              <a:t>Expectativas</a:t>
+            </a:r>
+            <a:r>
+              <a:rPr dirty="0"/>
+              <a:t> </a:t>
+            </a:r>
+            <a:r>
+              <a:rPr dirty="0" err="1"/>
+              <a:t>Infladas</a:t>
+            </a:r>
+            <a:r>
+              <a:rPr dirty="0"/>
+              <a:t>'.</a:t>
             </a:r>
           </a:p>
           <a:p>
@@ -5538,7 +6435,32 @@
               </a:defRPr>
             </a:pPr>
             <a:r>
-              <a:t>En 2023, blockchain enterprise habia caido al 'Valle de la Desilusion'.</a:t>
+              <a:rPr dirty="0"/>
+              <a:t>En 2023, blockchain enterprise </a:t>
+            </a:r>
+            <a:r>
+              <a:rPr dirty="0" err="1"/>
+              <a:t>habia</a:t>
+            </a:r>
+            <a:r>
+              <a:rPr dirty="0"/>
+              <a:t> </a:t>
+            </a:r>
+            <a:r>
+              <a:rPr dirty="0" err="1"/>
+              <a:t>caido</a:t>
+            </a:r>
+            <a:r>
+              <a:rPr dirty="0"/>
+              <a:t> al 'Valle de la </a:t>
+            </a:r>
+            <a:r>
+              <a:rPr dirty="0" err="1"/>
+              <a:t>Desilusion</a:t>
+            </a:r>
+            <a:r>
+              <a:rPr dirty="0"/>
+              <a:t>'.</a:t>
             </a:r>
           </a:p>
           <a:p>
@@ -5554,7 +6476,40 @@
               </a:defRPr>
             </a:pPr>
             <a:r>
-              <a:t>En 2025, empieza a subir la 'Pendiente de la Iluminacion'.</a:t>
+              <a:rPr dirty="0"/>
+              <a:t>En 2025, </a:t>
+            </a:r>
+            <a:r>
+              <a:rPr dirty="0" err="1"/>
+              <a:t>empieza</a:t>
+            </a:r>
+            <a:r>
+              <a:rPr dirty="0"/>
+              <a:t> a </a:t>
+            </a:r>
+            <a:r>
+              <a:rPr dirty="0" err="1"/>
+              <a:t>subir</a:t>
+            </a:r>
+            <a:r>
+              <a:rPr dirty="0"/>
+              <a:t> la '</a:t>
+            </a:r>
+            <a:r>
+              <a:rPr dirty="0" err="1"/>
+              <a:t>Pendiente</a:t>
+            </a:r>
+            <a:r>
+              <a:rPr dirty="0"/>
+              <a:t> de la </a:t>
+            </a:r>
+            <a:r>
+              <a:rPr dirty="0" err="1"/>
+              <a:t>Iluminacion</a:t>
+            </a:r>
+            <a:r>
+              <a:rPr dirty="0"/>
+              <a:t>'.</a:t>
             </a:r>
           </a:p>
           <a:p>
@@ -5569,6 +6524,7 @@
                 <a:latin typeface="Calibri"/>
               </a:defRPr>
             </a:pPr>
+            <a:endParaRPr dirty="0"/>
           </a:p>
           <a:p>
             <a:pPr>
@@ -5583,7 +6539,48 @@
               </a:defRPr>
             </a:pPr>
             <a:r>
-              <a:t>Esto es normal: TODAS las tecnologias pasan por este ciclo.</a:t>
+              <a:rPr dirty="0"/>
+              <a:t>Esto es normal: TODAS las </a:t>
+            </a:r>
+            <a:r>
+              <a:rPr dirty="0" err="1"/>
+              <a:t>tecnologias</a:t>
+            </a:r>
+            <a:r>
+              <a:rPr dirty="0"/>
+              <a:t> </a:t>
+            </a:r>
+            <a:r>
+              <a:rPr dirty="0" err="1"/>
+              <a:t>pasan</a:t>
+            </a:r>
+            <a:r>
+              <a:rPr dirty="0"/>
+              <a:t> </a:t>
+            </a:r>
+            <a:r>
+              <a:rPr dirty="0" err="1"/>
+              <a:t>por</a:t>
+            </a:r>
+            <a:r>
+              <a:rPr dirty="0"/>
+              <a:t> </a:t>
+            </a:r>
+            <a:r>
+              <a:rPr dirty="0" err="1"/>
+              <a:t>este</a:t>
+            </a:r>
+            <a:r>
+              <a:rPr dirty="0"/>
+              <a:t> </a:t>
+            </a:r>
+            <a:r>
+              <a:rPr dirty="0" err="1"/>
+              <a:t>ciclo</a:t>
+            </a:r>
+            <a:r>
+              <a:rPr dirty="0"/>
+              <a:t>.</a:t>
             </a:r>
           </a:p>
           <a:p>
@@ -5599,7 +6596,40 @@
               </a:defRPr>
             </a:pPr>
             <a:r>
-              <a:t>Internet en 2001, cloud en 2010, IA en 2024... y blockchain ahora.</a:t>
+              <a:rPr dirty="0"/>
+              <a:t>Internet </a:t>
+            </a:r>
+            <a:r>
+              <a:rPr dirty="0" err="1"/>
+              <a:t>en</a:t>
+            </a:r>
+            <a:r>
+              <a:rPr dirty="0"/>
+              <a:t> 2001, cloud </a:t>
+            </a:r>
+            <a:r>
+              <a:rPr dirty="0" err="1"/>
+              <a:t>en</a:t>
+            </a:r>
+            <a:r>
+              <a:rPr dirty="0"/>
+              <a:t> 2010, IA </a:t>
+            </a:r>
+            <a:r>
+              <a:rPr dirty="0" err="1"/>
+              <a:t>en</a:t>
+            </a:r>
+            <a:r>
+              <a:rPr dirty="0"/>
+              <a:t> 2024... y blockchain </a:t>
+            </a:r>
+            <a:r>
+              <a:rPr dirty="0" err="1"/>
+              <a:t>ahora</a:t>
+            </a:r>
+            <a:r>
+              <a:rPr dirty="0"/>
+              <a:t>.</a:t>
             </a:r>
           </a:p>
           <a:p>
@@ -5614,6 +6644,7 @@
                 <a:latin typeface="Calibri"/>
               </a:defRPr>
             </a:pPr>
+            <a:endParaRPr dirty="0"/>
           </a:p>
           <a:p>
             <a:pPr>
@@ -5628,7 +6659,32 @@
               </a:defRPr>
             </a:pPr>
             <a:r>
-              <a:t>La pregunta no es '¿blockchain esta muerto?'</a:t>
+              <a:rPr dirty="0"/>
+              <a:t>La </a:t>
+            </a:r>
+            <a:r>
+              <a:rPr dirty="0" err="1"/>
+              <a:t>pregunta</a:t>
+            </a:r>
+            <a:r>
+              <a:rPr dirty="0"/>
+              <a:t> no es '¿blockchain </a:t>
+            </a:r>
+            <a:r>
+              <a:rPr dirty="0" err="1"/>
+              <a:t>esta</a:t>
+            </a:r>
+            <a:r>
+              <a:rPr dirty="0"/>
+              <a:t> </a:t>
+            </a:r>
+            <a:r>
+              <a:rPr dirty="0" err="1"/>
+              <a:t>muerto</a:t>
+            </a:r>
+            <a:r>
+              <a:rPr dirty="0"/>
+              <a:t>?'</a:t>
             </a:r>
           </a:p>
           <a:p>
@@ -5644,7 +6700,40 @@
               </a:defRPr>
             </a:pPr>
             <a:r>
-              <a:t>La pregunta es '¿para que casos concretos es util?'</a:t>
+              <a:rPr dirty="0"/>
+              <a:t>La </a:t>
+            </a:r>
+            <a:r>
+              <a:rPr dirty="0" err="1"/>
+              <a:t>pregunta</a:t>
+            </a:r>
+            <a:r>
+              <a:rPr dirty="0"/>
+              <a:t> es '¿para </a:t>
+            </a:r>
+            <a:r>
+              <a:rPr dirty="0" err="1"/>
+              <a:t>que</a:t>
+            </a:r>
+            <a:r>
+              <a:rPr dirty="0"/>
+              <a:t> </a:t>
+            </a:r>
+            <a:r>
+              <a:rPr dirty="0" err="1"/>
+              <a:t>casos</a:t>
+            </a:r>
+            <a:r>
+              <a:rPr dirty="0"/>
+              <a:t> </a:t>
+            </a:r>
+            <a:r>
+              <a:rPr dirty="0" err="1"/>
+              <a:t>concretos</a:t>
+            </a:r>
+            <a:r>
+              <a:rPr dirty="0"/>
+              <a:t> es util?'</a:t>
             </a:r>
           </a:p>
           <a:p>
@@ -5660,7 +6749,56 @@
               </a:defRPr>
             </a:pPr>
             <a:r>
-              <a:t>Eso es exactamente lo que estamos aprendiendo en este modulo.</a:t>
+              <a:rPr dirty="0"/>
+              <a:t>Eso es </a:t>
+            </a:r>
+            <a:r>
+              <a:rPr dirty="0" err="1"/>
+              <a:t>exactamente</a:t>
+            </a:r>
+            <a:r>
+              <a:rPr dirty="0"/>
+              <a:t> lo </a:t>
+            </a:r>
+            <a:r>
+              <a:rPr dirty="0" err="1"/>
+              <a:t>que</a:t>
+            </a:r>
+            <a:r>
+              <a:rPr dirty="0"/>
+              <a:t> </a:t>
+            </a:r>
+            <a:r>
+              <a:rPr dirty="0" err="1"/>
+              <a:t>estamos</a:t>
+            </a:r>
+            <a:r>
+              <a:rPr dirty="0"/>
+              <a:t> </a:t>
+            </a:r>
+            <a:r>
+              <a:rPr dirty="0" err="1"/>
+              <a:t>aprendiendo</a:t>
+            </a:r>
+            <a:r>
+              <a:rPr dirty="0"/>
+              <a:t> </a:t>
+            </a:r>
+            <a:r>
+              <a:rPr dirty="0" err="1"/>
+              <a:t>en</a:t>
+            </a:r>
+            <a:r>
+              <a:rPr dirty="0"/>
+              <a:t> </a:t>
+            </a:r>
+            <a:r>
+              <a:rPr dirty="0" err="1"/>
+              <a:t>este</a:t>
+            </a:r>
+            <a:r>
+              <a:rPr dirty="0"/>
+              <a:t> modulo.</a:t>
             </a:r>
           </a:p>
         </p:txBody>
@@ -5674,7 +6812,7 @@
 </file>
 
 <file path=ppt/slides/slide9.xml><?xml version="1.0" encoding="utf-8"?>
-<p:sld xmlns:a="http://schemas.openxmlformats.org/drawingml/2006/main" xmlns:p="http://schemas.openxmlformats.org/presentationml/2006/main" xmlns:r="http://schemas.openxmlformats.org/officeDocument/2006/relationships">
+<p:sld xmlns:a="http://schemas.openxmlformats.org/drawingml/2006/main" xmlns:r="http://schemas.openxmlformats.org/officeDocument/2006/relationships" xmlns:p="http://schemas.openxmlformats.org/presentationml/2006/main">
   <p:cSld>
     <p:spTree>
       <p:nvGrpSpPr>
@@ -5682,7 +6820,14 @@
         <p:cNvGrpSpPr/>
         <p:nvPr/>
       </p:nvGrpSpPr>
-      <p:grpSpPr/>
+      <p:grpSpPr>
+        <a:xfrm>
+          <a:off x="0" y="0"/>
+          <a:ext cx="0" cy="0"/>
+          <a:chOff x="0" y="0"/>
+          <a:chExt cx="0" cy="0"/>
+        </a:xfrm>
+      </p:grpSpPr>
       <p:sp>
         <p:nvSpPr>
           <p:cNvPr id="2" name="Rectangle 1"/>
@@ -5723,6 +6868,7 @@
           <a:lstStyle/>
           <a:p>
             <a:pPr algn="ctr"/>
+            <a:endParaRPr/>
           </a:p>
         </p:txBody>
       </p:sp>
@@ -5800,6 +6946,7 @@
           <a:lstStyle/>
           <a:p>
             <a:pPr algn="ctr"/>
+            <a:endParaRPr/>
           </a:p>
         </p:txBody>
       </p:sp>
